--- a/Description/ResrvationNewLayout.pptx
+++ b/Description/ResrvationNewLayout.pptx
@@ -279,7 +279,7 @@
           <a:p>
             <a:fld id="{DDCE6D58-9B57-4731-A47B-3CD41B48F0A9}" type="datetimeFigureOut">
               <a:rPr lang="de-CH" smtClean="0"/>
-              <a:t>12.12.2025</a:t>
+              <a:t>08.04.2026</a:t>
             </a:fld>
             <a:endParaRPr lang="de-CH"/>
           </a:p>
@@ -449,7 +449,7 @@
           <a:p>
             <a:fld id="{DDCE6D58-9B57-4731-A47B-3CD41B48F0A9}" type="datetimeFigureOut">
               <a:rPr lang="de-CH" smtClean="0"/>
-              <a:t>12.12.2025</a:t>
+              <a:t>08.04.2026</a:t>
             </a:fld>
             <a:endParaRPr lang="de-CH"/>
           </a:p>
@@ -629,7 +629,7 @@
           <a:p>
             <a:fld id="{DDCE6D58-9B57-4731-A47B-3CD41B48F0A9}" type="datetimeFigureOut">
               <a:rPr lang="de-CH" smtClean="0"/>
-              <a:t>12.12.2025</a:t>
+              <a:t>08.04.2026</a:t>
             </a:fld>
             <a:endParaRPr lang="de-CH"/>
           </a:p>
@@ -799,7 +799,7 @@
           <a:p>
             <a:fld id="{DDCE6D58-9B57-4731-A47B-3CD41B48F0A9}" type="datetimeFigureOut">
               <a:rPr lang="de-CH" smtClean="0"/>
-              <a:t>12.12.2025</a:t>
+              <a:t>08.04.2026</a:t>
             </a:fld>
             <a:endParaRPr lang="de-CH"/>
           </a:p>
@@ -1045,7 +1045,7 @@
           <a:p>
             <a:fld id="{DDCE6D58-9B57-4731-A47B-3CD41B48F0A9}" type="datetimeFigureOut">
               <a:rPr lang="de-CH" smtClean="0"/>
-              <a:t>12.12.2025</a:t>
+              <a:t>08.04.2026</a:t>
             </a:fld>
             <a:endParaRPr lang="de-CH"/>
           </a:p>
@@ -1277,7 +1277,7 @@
           <a:p>
             <a:fld id="{DDCE6D58-9B57-4731-A47B-3CD41B48F0A9}" type="datetimeFigureOut">
               <a:rPr lang="de-CH" smtClean="0"/>
-              <a:t>12.12.2025</a:t>
+              <a:t>08.04.2026</a:t>
             </a:fld>
             <a:endParaRPr lang="de-CH"/>
           </a:p>
@@ -1644,7 +1644,7 @@
           <a:p>
             <a:fld id="{DDCE6D58-9B57-4731-A47B-3CD41B48F0A9}" type="datetimeFigureOut">
               <a:rPr lang="de-CH" smtClean="0"/>
-              <a:t>12.12.2025</a:t>
+              <a:t>08.04.2026</a:t>
             </a:fld>
             <a:endParaRPr lang="de-CH"/>
           </a:p>
@@ -1762,7 +1762,7 @@
           <a:p>
             <a:fld id="{DDCE6D58-9B57-4731-A47B-3CD41B48F0A9}" type="datetimeFigureOut">
               <a:rPr lang="de-CH" smtClean="0"/>
-              <a:t>12.12.2025</a:t>
+              <a:t>08.04.2026</a:t>
             </a:fld>
             <a:endParaRPr lang="de-CH"/>
           </a:p>
@@ -1857,7 +1857,7 @@
           <a:p>
             <a:fld id="{DDCE6D58-9B57-4731-A47B-3CD41B48F0A9}" type="datetimeFigureOut">
               <a:rPr lang="de-CH" smtClean="0"/>
-              <a:t>12.12.2025</a:t>
+              <a:t>08.04.2026</a:t>
             </a:fld>
             <a:endParaRPr lang="de-CH"/>
           </a:p>
@@ -2134,7 +2134,7 @@
           <a:p>
             <a:fld id="{DDCE6D58-9B57-4731-A47B-3CD41B48F0A9}" type="datetimeFigureOut">
               <a:rPr lang="de-CH" smtClean="0"/>
-              <a:t>12.12.2025</a:t>
+              <a:t>08.04.2026</a:t>
             </a:fld>
             <a:endParaRPr lang="de-CH"/>
           </a:p>
@@ -2387,7 +2387,7 @@
           <a:p>
             <a:fld id="{DDCE6D58-9B57-4731-A47B-3CD41B48F0A9}" type="datetimeFigureOut">
               <a:rPr lang="de-CH" smtClean="0"/>
-              <a:t>12.12.2025</a:t>
+              <a:t>08.04.2026</a:t>
             </a:fld>
             <a:endParaRPr lang="de-CH"/>
           </a:p>
@@ -2600,7 +2600,7 @@
           <a:p>
             <a:fld id="{DDCE6D58-9B57-4731-A47B-3CD41B48F0A9}" type="datetimeFigureOut">
               <a:rPr lang="de-CH" smtClean="0"/>
-              <a:t>12.12.2025</a:t>
+              <a:t>08.04.2026</a:t>
             </a:fld>
             <a:endParaRPr lang="de-CH"/>
           </a:p>
@@ -5974,7 +5974,7 @@
         </p:nvCxnSpPr>
         <p:spPr>
           <a:xfrm flipV="1">
-            <a:off x="2557430" y="5053535"/>
+            <a:off x="1507947" y="5053535"/>
             <a:ext cx="8998" cy="919559"/>
           </a:xfrm>
           <a:prstGeom prst="line">
@@ -6013,7 +6013,7 @@
         </p:nvCxnSpPr>
         <p:spPr>
           <a:xfrm flipH="1" flipV="1">
-            <a:off x="2663709" y="4858886"/>
+            <a:off x="1614226" y="4858886"/>
             <a:ext cx="1251" cy="194649"/>
           </a:xfrm>
           <a:prstGeom prst="line">
@@ -6049,7 +6049,7 @@
         </p:nvSpPr>
         <p:spPr>
           <a:xfrm>
-            <a:off x="1802397" y="4554594"/>
+            <a:off x="752914" y="4554594"/>
             <a:ext cx="1722623" cy="304292"/>
           </a:xfrm>
           <a:prstGeom prst="rect">
@@ -6124,7 +6124,7 @@
         </p:nvCxnSpPr>
         <p:spPr>
           <a:xfrm flipV="1">
-            <a:off x="2418115" y="5053535"/>
+            <a:off x="1368632" y="5053535"/>
             <a:ext cx="0" cy="204892"/>
           </a:xfrm>
           <a:prstGeom prst="line">
@@ -6162,7 +6162,7 @@
         </p:nvCxnSpPr>
         <p:spPr>
           <a:xfrm flipV="1">
-            <a:off x="2740179" y="5046458"/>
+            <a:off x="1690696" y="5046458"/>
             <a:ext cx="0" cy="201916"/>
           </a:xfrm>
           <a:prstGeom prst="line">
@@ -6200,7 +6200,7 @@
         </p:nvCxnSpPr>
         <p:spPr>
           <a:xfrm flipV="1">
-            <a:off x="2024085" y="5046397"/>
+            <a:off x="974602" y="5046397"/>
             <a:ext cx="0" cy="222112"/>
           </a:xfrm>
           <a:prstGeom prst="line">
@@ -6238,7 +6238,7 @@
         </p:nvCxnSpPr>
         <p:spPr>
           <a:xfrm flipV="1">
-            <a:off x="3358764" y="5046397"/>
+            <a:off x="2309281" y="5046397"/>
             <a:ext cx="0" cy="212030"/>
           </a:xfrm>
           <a:prstGeom prst="line">
@@ -6276,7 +6276,7 @@
         </p:nvCxnSpPr>
         <p:spPr>
           <a:xfrm>
-            <a:off x="1825343" y="5053535"/>
+            <a:off x="775860" y="5053535"/>
             <a:ext cx="1627524" cy="0"/>
           </a:xfrm>
           <a:prstGeom prst="line">
@@ -6312,7 +6312,7 @@
         </p:nvSpPr>
         <p:spPr>
           <a:xfrm>
-            <a:off x="1867391" y="5518510"/>
+            <a:off x="817908" y="5518510"/>
             <a:ext cx="1518243" cy="273141"/>
           </a:xfrm>
           <a:prstGeom prst="rect">
@@ -6375,7 +6375,7 @@
         </p:nvSpPr>
         <p:spPr>
           <a:xfrm>
-            <a:off x="2111634" y="5973094"/>
+            <a:off x="1062151" y="5973094"/>
             <a:ext cx="891591" cy="273141"/>
           </a:xfrm>
           <a:prstGeom prst="rect">
@@ -6445,7 +6445,7 @@
         </p:nvSpPr>
         <p:spPr>
           <a:xfrm>
-            <a:off x="1877892" y="6268792"/>
+            <a:off x="828409" y="6268792"/>
             <a:ext cx="1377072" cy="338554"/>
           </a:xfrm>
           <a:prstGeom prst="rect">
@@ -6536,7 +6536,7 @@
         </p:nvCxnSpPr>
         <p:spPr>
           <a:xfrm flipH="1" flipV="1">
-            <a:off x="2663708" y="4366589"/>
+            <a:off x="1614225" y="4366589"/>
             <a:ext cx="1251" cy="194649"/>
           </a:xfrm>
           <a:prstGeom prst="line">
@@ -6572,7 +6572,7 @@
         </p:nvSpPr>
         <p:spPr>
           <a:xfrm>
-            <a:off x="2217912" y="4086615"/>
+            <a:off x="1168429" y="4086615"/>
             <a:ext cx="891591" cy="273141"/>
           </a:xfrm>
           <a:prstGeom prst="rect">
@@ -6624,6 +6624,559 @@
               </a:solidFill>
               <a:latin typeface="Arial" panose="020B0604020202020204" pitchFamily="34" charset="0"/>
               <a:cs typeface="Arial" panose="020B0604020202020204" pitchFamily="34" charset="0"/>
+            </a:endParaRPr>
+          </a:p>
+        </p:txBody>
+      </p:sp>
+      <p:cxnSp>
+        <p:nvCxnSpPr>
+          <p:cNvPr id="3" name="Gerader Verbinder 2">
+            <a:extLst>
+              <a:ext uri="{FF2B5EF4-FFF2-40B4-BE49-F238E27FC236}">
+                <a16:creationId xmlns:a16="http://schemas.microsoft.com/office/drawing/2014/main" id="{A1C8A4ED-712E-ABD4-E325-253B78714BBC}"/>
+              </a:ext>
+            </a:extLst>
+          </p:cNvPr>
+          <p:cNvCxnSpPr>
+            <a:cxnSpLocks/>
+            <a:stCxn id="26" idx="0"/>
+          </p:cNvCxnSpPr>
+          <p:nvPr/>
+        </p:nvCxnSpPr>
+        <p:spPr>
+          <a:xfrm flipV="1">
+            <a:off x="3866577" y="4962046"/>
+            <a:ext cx="8998" cy="919559"/>
+          </a:xfrm>
+          <a:prstGeom prst="line">
+            <a:avLst/>
+          </a:prstGeom>
+        </p:spPr>
+        <p:style>
+          <a:lnRef idx="1">
+            <a:schemeClr val="accent1"/>
+          </a:lnRef>
+          <a:fillRef idx="0">
+            <a:schemeClr val="accent1"/>
+          </a:fillRef>
+          <a:effectRef idx="0">
+            <a:schemeClr val="accent1"/>
+          </a:effectRef>
+          <a:fontRef idx="minor">
+            <a:schemeClr val="tx1"/>
+          </a:fontRef>
+        </p:style>
+      </p:cxnSp>
+      <p:cxnSp>
+        <p:nvCxnSpPr>
+          <p:cNvPr id="4" name="Gerader Verbinder 3">
+            <a:extLst>
+              <a:ext uri="{FF2B5EF4-FFF2-40B4-BE49-F238E27FC236}">
+                <a16:creationId xmlns:a16="http://schemas.microsoft.com/office/drawing/2014/main" id="{0C6F37E6-5E55-6F34-8225-49E41B650651}"/>
+              </a:ext>
+            </a:extLst>
+          </p:cNvPr>
+          <p:cNvCxnSpPr>
+            <a:cxnSpLocks/>
+            <a:endCxn id="5" idx="2"/>
+          </p:cNvCxnSpPr>
+          <p:nvPr/>
+        </p:nvCxnSpPr>
+        <p:spPr>
+          <a:xfrm flipH="1" flipV="1">
+            <a:off x="3972856" y="4767397"/>
+            <a:ext cx="1251" cy="194649"/>
+          </a:xfrm>
+          <a:prstGeom prst="line">
+            <a:avLst/>
+          </a:prstGeom>
+        </p:spPr>
+        <p:style>
+          <a:lnRef idx="1">
+            <a:schemeClr val="accent1"/>
+          </a:lnRef>
+          <a:fillRef idx="0">
+            <a:schemeClr val="accent1"/>
+          </a:fillRef>
+          <a:effectRef idx="0">
+            <a:schemeClr val="accent1"/>
+          </a:effectRef>
+          <a:fontRef idx="minor">
+            <a:schemeClr val="tx1"/>
+          </a:fontRef>
+        </p:style>
+      </p:cxnSp>
+      <p:sp>
+        <p:nvSpPr>
+          <p:cNvPr id="5" name="Rechteck 4">
+            <a:extLst>
+              <a:ext uri="{FF2B5EF4-FFF2-40B4-BE49-F238E27FC236}">
+                <a16:creationId xmlns:a16="http://schemas.microsoft.com/office/drawing/2014/main" id="{4013CDAC-A30B-7F2C-D3F9-CE07E6187D8B}"/>
+              </a:ext>
+            </a:extLst>
+          </p:cNvPr>
+          <p:cNvSpPr/>
+          <p:nvPr/>
+        </p:nvSpPr>
+        <p:spPr>
+          <a:xfrm>
+            <a:off x="3111544" y="4463105"/>
+            <a:ext cx="1722623" cy="304292"/>
+          </a:xfrm>
+          <a:prstGeom prst="rect">
+            <a:avLst/>
+          </a:prstGeom>
+          <a:solidFill>
+            <a:srgbClr val="FFFF00"/>
+          </a:solidFill>
+          <a:ln>
+            <a:solidFill>
+              <a:schemeClr val="tx1"/>
+            </a:solidFill>
+          </a:ln>
+        </p:spPr>
+        <p:style>
+          <a:lnRef idx="2">
+            <a:schemeClr val="accent1">
+              <a:shade val="50000"/>
+            </a:schemeClr>
+          </a:lnRef>
+          <a:fillRef idx="1">
+            <a:schemeClr val="accent1"/>
+          </a:fillRef>
+          <a:effectRef idx="0">
+            <a:schemeClr val="accent1"/>
+          </a:effectRef>
+          <a:fontRef idx="minor">
+            <a:schemeClr val="lt1"/>
+          </a:fontRef>
+        </p:style>
+        <p:txBody>
+          <a:bodyPr rtlCol="0" anchor="ctr"/>
+          <a:lstStyle/>
+          <a:p>
+            <a:pPr algn="ctr"/>
+            <a:r>
+              <a:rPr lang="de-CH" sz="1000" b="1" dirty="0">
+                <a:solidFill>
+                  <a:schemeClr val="tx1"/>
+                </a:solidFill>
+                <a:latin typeface="Arial" panose="020B0604020202020204" pitchFamily="34" charset="0"/>
+                <a:cs typeface="Arial" panose="020B0604020202020204" pitchFamily="34" charset="0"/>
+              </a:rPr>
+              <a:t>Reservation </a:t>
+            </a:r>
+          </a:p>
+        </p:txBody>
+      </p:sp>
+      <p:cxnSp>
+        <p:nvCxnSpPr>
+          <p:cNvPr id="6" name="Gerader Verbinder 5">
+            <a:extLst>
+              <a:ext uri="{FF2B5EF4-FFF2-40B4-BE49-F238E27FC236}">
+                <a16:creationId xmlns:a16="http://schemas.microsoft.com/office/drawing/2014/main" id="{DCA4DC75-4DE1-4D0D-D8F8-3BA771FBB4FC}"/>
+              </a:ext>
+            </a:extLst>
+          </p:cNvPr>
+          <p:cNvCxnSpPr>
+            <a:cxnSpLocks/>
+          </p:cNvCxnSpPr>
+          <p:nvPr/>
+        </p:nvCxnSpPr>
+        <p:spPr>
+          <a:xfrm flipV="1">
+            <a:off x="3727262" y="4962046"/>
+            <a:ext cx="0" cy="204892"/>
+          </a:xfrm>
+          <a:prstGeom prst="line">
+            <a:avLst/>
+          </a:prstGeom>
+        </p:spPr>
+        <p:style>
+          <a:lnRef idx="1">
+            <a:schemeClr val="accent1"/>
+          </a:lnRef>
+          <a:fillRef idx="0">
+            <a:schemeClr val="accent1"/>
+          </a:fillRef>
+          <a:effectRef idx="0">
+            <a:schemeClr val="accent1"/>
+          </a:effectRef>
+          <a:fontRef idx="minor">
+            <a:schemeClr val="tx1"/>
+          </a:fontRef>
+        </p:style>
+      </p:cxnSp>
+      <p:cxnSp>
+        <p:nvCxnSpPr>
+          <p:cNvPr id="12" name="Gerader Verbinder 11">
+            <a:extLst>
+              <a:ext uri="{FF2B5EF4-FFF2-40B4-BE49-F238E27FC236}">
+                <a16:creationId xmlns:a16="http://schemas.microsoft.com/office/drawing/2014/main" id="{D45BE424-E442-3C1A-F83F-7E854C9E8765}"/>
+              </a:ext>
+            </a:extLst>
+          </p:cNvPr>
+          <p:cNvCxnSpPr>
+            <a:cxnSpLocks/>
+          </p:cNvCxnSpPr>
+          <p:nvPr/>
+        </p:nvCxnSpPr>
+        <p:spPr>
+          <a:xfrm flipV="1">
+            <a:off x="4049326" y="4954969"/>
+            <a:ext cx="0" cy="201916"/>
+          </a:xfrm>
+          <a:prstGeom prst="line">
+            <a:avLst/>
+          </a:prstGeom>
+        </p:spPr>
+        <p:style>
+          <a:lnRef idx="1">
+            <a:schemeClr val="accent1"/>
+          </a:lnRef>
+          <a:fillRef idx="0">
+            <a:schemeClr val="accent1"/>
+          </a:fillRef>
+          <a:effectRef idx="0">
+            <a:schemeClr val="accent1"/>
+          </a:effectRef>
+          <a:fontRef idx="minor">
+            <a:schemeClr val="tx1"/>
+          </a:fontRef>
+        </p:style>
+      </p:cxnSp>
+      <p:cxnSp>
+        <p:nvCxnSpPr>
+          <p:cNvPr id="13" name="Gerader Verbinder 12">
+            <a:extLst>
+              <a:ext uri="{FF2B5EF4-FFF2-40B4-BE49-F238E27FC236}">
+                <a16:creationId xmlns:a16="http://schemas.microsoft.com/office/drawing/2014/main" id="{DDFF4A28-2CC8-9580-4693-C08B05F1E6EE}"/>
+              </a:ext>
+            </a:extLst>
+          </p:cNvPr>
+          <p:cNvCxnSpPr>
+            <a:cxnSpLocks/>
+          </p:cNvCxnSpPr>
+          <p:nvPr/>
+        </p:nvCxnSpPr>
+        <p:spPr>
+          <a:xfrm flipV="1">
+            <a:off x="3333232" y="4954908"/>
+            <a:ext cx="0" cy="222112"/>
+          </a:xfrm>
+          <a:prstGeom prst="line">
+            <a:avLst/>
+          </a:prstGeom>
+        </p:spPr>
+        <p:style>
+          <a:lnRef idx="1">
+            <a:schemeClr val="accent1"/>
+          </a:lnRef>
+          <a:fillRef idx="0">
+            <a:schemeClr val="accent1"/>
+          </a:fillRef>
+          <a:effectRef idx="0">
+            <a:schemeClr val="accent1"/>
+          </a:effectRef>
+          <a:fontRef idx="minor">
+            <a:schemeClr val="tx1"/>
+          </a:fontRef>
+        </p:style>
+      </p:cxnSp>
+      <p:cxnSp>
+        <p:nvCxnSpPr>
+          <p:cNvPr id="18" name="Gerader Verbinder 17">
+            <a:extLst>
+              <a:ext uri="{FF2B5EF4-FFF2-40B4-BE49-F238E27FC236}">
+                <a16:creationId xmlns:a16="http://schemas.microsoft.com/office/drawing/2014/main" id="{4983D26B-4AF9-081D-011A-9B3FDC0E0758}"/>
+              </a:ext>
+            </a:extLst>
+          </p:cNvPr>
+          <p:cNvCxnSpPr>
+            <a:cxnSpLocks/>
+          </p:cNvCxnSpPr>
+          <p:nvPr/>
+        </p:nvCxnSpPr>
+        <p:spPr>
+          <a:xfrm flipV="1">
+            <a:off x="4667911" y="4954908"/>
+            <a:ext cx="0" cy="212030"/>
+          </a:xfrm>
+          <a:prstGeom prst="line">
+            <a:avLst/>
+          </a:prstGeom>
+        </p:spPr>
+        <p:style>
+          <a:lnRef idx="1">
+            <a:schemeClr val="accent1"/>
+          </a:lnRef>
+          <a:fillRef idx="0">
+            <a:schemeClr val="accent1"/>
+          </a:fillRef>
+          <a:effectRef idx="0">
+            <a:schemeClr val="accent1"/>
+          </a:effectRef>
+          <a:fontRef idx="minor">
+            <a:schemeClr val="tx1"/>
+          </a:fontRef>
+        </p:style>
+      </p:cxnSp>
+      <p:cxnSp>
+        <p:nvCxnSpPr>
+          <p:cNvPr id="19" name="Gerader Verbinder 18">
+            <a:extLst>
+              <a:ext uri="{FF2B5EF4-FFF2-40B4-BE49-F238E27FC236}">
+                <a16:creationId xmlns:a16="http://schemas.microsoft.com/office/drawing/2014/main" id="{D4E55BC4-5CD8-CACC-7BCE-BC18E86089E5}"/>
+              </a:ext>
+            </a:extLst>
+          </p:cNvPr>
+          <p:cNvCxnSpPr>
+            <a:cxnSpLocks/>
+          </p:cNvCxnSpPr>
+          <p:nvPr/>
+        </p:nvCxnSpPr>
+        <p:spPr>
+          <a:xfrm>
+            <a:off x="3134490" y="4962046"/>
+            <a:ext cx="1627524" cy="0"/>
+          </a:xfrm>
+          <a:prstGeom prst="line">
+            <a:avLst/>
+          </a:prstGeom>
+        </p:spPr>
+        <p:style>
+          <a:lnRef idx="1">
+            <a:schemeClr val="accent1"/>
+          </a:lnRef>
+          <a:fillRef idx="0">
+            <a:schemeClr val="accent1"/>
+          </a:fillRef>
+          <a:effectRef idx="0">
+            <a:schemeClr val="accent1"/>
+          </a:effectRef>
+          <a:fontRef idx="minor">
+            <a:schemeClr val="tx1"/>
+          </a:fontRef>
+        </p:style>
+      </p:cxnSp>
+      <p:sp>
+        <p:nvSpPr>
+          <p:cNvPr id="21" name="Rechteck 20">
+            <a:extLst>
+              <a:ext uri="{FF2B5EF4-FFF2-40B4-BE49-F238E27FC236}">
+                <a16:creationId xmlns:a16="http://schemas.microsoft.com/office/drawing/2014/main" id="{E89A51E9-04E6-4E94-D814-3FCC60B9A8C1}"/>
+              </a:ext>
+            </a:extLst>
+          </p:cNvPr>
+          <p:cNvSpPr/>
+          <p:nvPr/>
+        </p:nvSpPr>
+        <p:spPr>
+          <a:xfrm>
+            <a:off x="3176538" y="5427021"/>
+            <a:ext cx="1518243" cy="273141"/>
+          </a:xfrm>
+          <a:prstGeom prst="rect">
+            <a:avLst/>
+          </a:prstGeom>
+          <a:solidFill>
+            <a:srgbClr val="FFFF00"/>
+          </a:solidFill>
+          <a:ln>
+            <a:solidFill>
+              <a:schemeClr val="tx1"/>
+            </a:solidFill>
+          </a:ln>
+        </p:spPr>
+        <p:style>
+          <a:lnRef idx="2">
+            <a:schemeClr val="accent1">
+              <a:shade val="50000"/>
+            </a:schemeClr>
+          </a:lnRef>
+          <a:fillRef idx="1">
+            <a:schemeClr val="accent1"/>
+          </a:fillRef>
+          <a:effectRef idx="0">
+            <a:schemeClr val="accent1"/>
+          </a:effectRef>
+          <a:fontRef idx="minor">
+            <a:schemeClr val="lt1"/>
+          </a:fontRef>
+        </p:style>
+        <p:txBody>
+          <a:bodyPr rtlCol="0" anchor="ctr"/>
+          <a:lstStyle/>
+          <a:p>
+            <a:pPr algn="ctr"/>
+            <a:r>
+              <a:rPr lang="de-CH" sz="1000" b="1" dirty="0">
+                <a:solidFill>
+                  <a:schemeClr val="tx1"/>
+                </a:solidFill>
+                <a:latin typeface="Arial" panose="020B0604020202020204" pitchFamily="34" charset="0"/>
+                <a:cs typeface="Arial" panose="020B0604020202020204" pitchFamily="34" charset="0"/>
+              </a:rPr>
+              <a:t>Spagi_76_Chairs_V_3</a:t>
+            </a:r>
+          </a:p>
+        </p:txBody>
+      </p:sp>
+      <p:sp>
+        <p:nvSpPr>
+          <p:cNvPr id="26" name="Rechteck 25">
+            <a:extLst>
+              <a:ext uri="{FF2B5EF4-FFF2-40B4-BE49-F238E27FC236}">
+                <a16:creationId xmlns:a16="http://schemas.microsoft.com/office/drawing/2014/main" id="{00066860-1EB9-0E82-CFE0-565B70EC4A50}"/>
+              </a:ext>
+            </a:extLst>
+          </p:cNvPr>
+          <p:cNvSpPr/>
+          <p:nvPr/>
+        </p:nvSpPr>
+        <p:spPr>
+          <a:xfrm>
+            <a:off x="3420781" y="5881605"/>
+            <a:ext cx="891591" cy="273141"/>
+          </a:xfrm>
+          <a:prstGeom prst="rect">
+            <a:avLst/>
+          </a:prstGeom>
+          <a:solidFill>
+            <a:srgbClr val="FFFF00"/>
+          </a:solidFill>
+          <a:ln>
+            <a:solidFill>
+              <a:schemeClr val="tx1"/>
+            </a:solidFill>
+          </a:ln>
+        </p:spPr>
+        <p:style>
+          <a:lnRef idx="2">
+            <a:schemeClr val="accent1">
+              <a:shade val="50000"/>
+            </a:schemeClr>
+          </a:lnRef>
+          <a:fillRef idx="1">
+            <a:schemeClr val="accent1"/>
+          </a:fillRef>
+          <a:effectRef idx="0">
+            <a:schemeClr val="accent1"/>
+          </a:effectRef>
+          <a:fontRef idx="minor">
+            <a:schemeClr val="lt1"/>
+          </a:fontRef>
+        </p:style>
+        <p:txBody>
+          <a:bodyPr rtlCol="0" anchor="ctr"/>
+          <a:lstStyle/>
+          <a:p>
+            <a:pPr algn="ctr"/>
+            <a:r>
+              <a:rPr lang="de-CH" sz="1000" b="1">
+                <a:solidFill>
+                  <a:schemeClr val="tx1"/>
+                </a:solidFill>
+                <a:latin typeface="Arial" panose="020B0604020202020204" pitchFamily="34" charset="0"/>
+                <a:cs typeface="Arial" panose="020B0604020202020204" pitchFamily="34" charset="0"/>
+              </a:rPr>
+              <a:t>SaisonXML</a:t>
+            </a:r>
+            <a:endParaRPr lang="de-CH" sz="1000" b="1" dirty="0">
+              <a:solidFill>
+                <a:schemeClr val="tx1"/>
+              </a:solidFill>
+              <a:latin typeface="Arial" panose="020B0604020202020204" pitchFamily="34" charset="0"/>
+              <a:cs typeface="Arial" panose="020B0604020202020204" pitchFamily="34" charset="0"/>
+            </a:endParaRPr>
+          </a:p>
+        </p:txBody>
+      </p:sp>
+      <p:sp>
+        <p:nvSpPr>
+          <p:cNvPr id="42" name="Textfeld 41">
+            <a:extLst>
+              <a:ext uri="{FF2B5EF4-FFF2-40B4-BE49-F238E27FC236}">
+                <a16:creationId xmlns:a16="http://schemas.microsoft.com/office/drawing/2014/main" id="{EB6C68BC-06CF-A893-DAA7-B5DE092FEFB6}"/>
+              </a:ext>
+            </a:extLst>
+          </p:cNvPr>
+          <p:cNvSpPr txBox="1"/>
+          <p:nvPr/>
+        </p:nvSpPr>
+        <p:spPr>
+          <a:xfrm>
+            <a:off x="3187039" y="6177303"/>
+            <a:ext cx="1377072" cy="338554"/>
+          </a:xfrm>
+          <a:prstGeom prst="rect">
+            <a:avLst/>
+          </a:prstGeom>
+          <a:noFill/>
+        </p:spPr>
+        <p:txBody>
+          <a:bodyPr wrap="square" rtlCol="0">
+            <a:spAutoFit/>
+          </a:bodyPr>
+          <a:lstStyle/>
+          <a:p>
+            <a:pPr algn="ctr"/>
+            <a:r>
+              <a:rPr lang="de-CH" sz="800" b="1" dirty="0">
+                <a:latin typeface="Aptos Narrow" panose="020B0004020202020204" pitchFamily="34" charset="0"/>
+              </a:rPr>
+              <a:t>Event </a:t>
+            </a:r>
+            <a:r>
+              <a:rPr lang="de-CH" sz="800" b="1" dirty="0" err="1">
+                <a:latin typeface="Aptos Narrow" panose="020B0004020202020204" pitchFamily="34" charset="0"/>
+              </a:rPr>
+              <a:t>program</a:t>
+            </a:r>
+            <a:r>
+              <a:rPr lang="de-CH" sz="800" b="1" dirty="0">
+                <a:latin typeface="Aptos Narrow" panose="020B0004020202020204" pitchFamily="34" charset="0"/>
+              </a:rPr>
+              <a:t> XML </a:t>
+            </a:r>
+            <a:r>
+              <a:rPr lang="de-CH" sz="800" b="1" dirty="0" err="1">
+                <a:latin typeface="Aptos Narrow" panose="020B0004020202020204" pitchFamily="34" charset="0"/>
+              </a:rPr>
+              <a:t>file</a:t>
+            </a:r>
+            <a:endParaRPr lang="de-CH" sz="800" b="1" dirty="0">
+              <a:latin typeface="Aptos Narrow" panose="020B0004020202020204" pitchFamily="34" charset="0"/>
+            </a:endParaRPr>
+          </a:p>
+          <a:p>
+            <a:pPr algn="ctr"/>
+            <a:r>
+              <a:rPr lang="de-CH" sz="800" b="1" dirty="0">
+                <a:latin typeface="Aptos Narrow" panose="020B0004020202020204" pitchFamily="34" charset="0"/>
+              </a:rPr>
+              <a:t>Event </a:t>
+            </a:r>
+            <a:r>
+              <a:rPr lang="de-CH" sz="800" b="1" dirty="0" err="1">
+                <a:latin typeface="Aptos Narrow" panose="020B0004020202020204" pitchFamily="34" charset="0"/>
+              </a:rPr>
+              <a:t>reservation</a:t>
+            </a:r>
+            <a:r>
+              <a:rPr lang="de-CH" sz="800" b="1" dirty="0">
+                <a:latin typeface="Aptos Narrow" panose="020B0004020202020204" pitchFamily="34" charset="0"/>
+              </a:rPr>
+              <a:t> XML </a:t>
+            </a:r>
+            <a:r>
+              <a:rPr lang="de-CH" sz="800" b="1" dirty="0" err="1">
+                <a:latin typeface="Aptos Narrow" panose="020B0004020202020204" pitchFamily="34" charset="0"/>
+              </a:rPr>
+              <a:t>files</a:t>
+            </a:r>
+            <a:endParaRPr lang="de-CH" sz="800" b="1" dirty="0">
+              <a:latin typeface="Aptos Narrow" panose="020B0004020202020204" pitchFamily="34" charset="0"/>
             </a:endParaRPr>
           </a:p>
         </p:txBody>
@@ -13044,6 +13597,235 @@
       </p:grpSpPr>
       <p:cxnSp>
         <p:nvCxnSpPr>
+          <p:cNvPr id="77" name="Gerader Verbinder 76">
+            <a:extLst>
+              <a:ext uri="{FF2B5EF4-FFF2-40B4-BE49-F238E27FC236}">
+                <a16:creationId xmlns:a16="http://schemas.microsoft.com/office/drawing/2014/main" id="{A1F06A0D-82E4-6955-44DF-7D1425A4BE0F}"/>
+              </a:ext>
+            </a:extLst>
+          </p:cNvPr>
+          <p:cNvCxnSpPr>
+            <a:cxnSpLocks/>
+          </p:cNvCxnSpPr>
+          <p:nvPr/>
+        </p:nvCxnSpPr>
+        <p:spPr>
+          <a:xfrm>
+            <a:off x="9799781" y="4646543"/>
+            <a:ext cx="14044" cy="790430"/>
+          </a:xfrm>
+          <a:prstGeom prst="line">
+            <a:avLst/>
+          </a:prstGeom>
+        </p:spPr>
+        <p:style>
+          <a:lnRef idx="1">
+            <a:schemeClr val="accent1"/>
+          </a:lnRef>
+          <a:fillRef idx="0">
+            <a:schemeClr val="accent1"/>
+          </a:fillRef>
+          <a:effectRef idx="0">
+            <a:schemeClr val="accent1"/>
+          </a:effectRef>
+          <a:fontRef idx="minor">
+            <a:schemeClr val="tx1"/>
+          </a:fontRef>
+        </p:style>
+      </p:cxnSp>
+      <p:cxnSp>
+        <p:nvCxnSpPr>
+          <p:cNvPr id="85" name="Gerader Verbinder 84">
+            <a:extLst>
+              <a:ext uri="{FF2B5EF4-FFF2-40B4-BE49-F238E27FC236}">
+                <a16:creationId xmlns:a16="http://schemas.microsoft.com/office/drawing/2014/main" id="{E2F4A3EA-B033-0947-D2C5-2A2256555906}"/>
+              </a:ext>
+            </a:extLst>
+          </p:cNvPr>
+          <p:cNvCxnSpPr>
+            <a:cxnSpLocks/>
+          </p:cNvCxnSpPr>
+          <p:nvPr/>
+        </p:nvCxnSpPr>
+        <p:spPr>
+          <a:xfrm flipV="1">
+            <a:off x="9654187" y="4646543"/>
+            <a:ext cx="0" cy="611259"/>
+          </a:xfrm>
+          <a:prstGeom prst="line">
+            <a:avLst/>
+          </a:prstGeom>
+        </p:spPr>
+        <p:style>
+          <a:lnRef idx="1">
+            <a:schemeClr val="accent1"/>
+          </a:lnRef>
+          <a:fillRef idx="0">
+            <a:schemeClr val="accent1"/>
+          </a:fillRef>
+          <a:effectRef idx="0">
+            <a:schemeClr val="accent1"/>
+          </a:effectRef>
+          <a:fontRef idx="minor">
+            <a:schemeClr val="tx1"/>
+          </a:fontRef>
+        </p:style>
+      </p:cxnSp>
+      <p:cxnSp>
+        <p:nvCxnSpPr>
+          <p:cNvPr id="73" name="Gerader Verbinder 72">
+            <a:extLst>
+              <a:ext uri="{FF2B5EF4-FFF2-40B4-BE49-F238E27FC236}">
+                <a16:creationId xmlns:a16="http://schemas.microsoft.com/office/drawing/2014/main" id="{55A48E4F-27A3-7DD2-8BB5-9E1F655A0733}"/>
+              </a:ext>
+            </a:extLst>
+          </p:cNvPr>
+          <p:cNvCxnSpPr>
+            <a:cxnSpLocks/>
+          </p:cNvCxnSpPr>
+          <p:nvPr/>
+        </p:nvCxnSpPr>
+        <p:spPr>
+          <a:xfrm flipV="1">
+            <a:off x="9506160" y="4646543"/>
+            <a:ext cx="0" cy="421290"/>
+          </a:xfrm>
+          <a:prstGeom prst="line">
+            <a:avLst/>
+          </a:prstGeom>
+        </p:spPr>
+        <p:style>
+          <a:lnRef idx="1">
+            <a:schemeClr val="accent1"/>
+          </a:lnRef>
+          <a:fillRef idx="0">
+            <a:schemeClr val="accent1"/>
+          </a:fillRef>
+          <a:effectRef idx="0">
+            <a:schemeClr val="accent1"/>
+          </a:effectRef>
+          <a:fontRef idx="minor">
+            <a:schemeClr val="tx1"/>
+          </a:fontRef>
+        </p:style>
+      </p:cxnSp>
+      <p:cxnSp>
+        <p:nvCxnSpPr>
+          <p:cNvPr id="76" name="Gerader Verbinder 75">
+            <a:extLst>
+              <a:ext uri="{FF2B5EF4-FFF2-40B4-BE49-F238E27FC236}">
+                <a16:creationId xmlns:a16="http://schemas.microsoft.com/office/drawing/2014/main" id="{39D191F9-D41D-0AB1-8FD5-D7C4CA692EA5}"/>
+              </a:ext>
+            </a:extLst>
+          </p:cNvPr>
+          <p:cNvCxnSpPr>
+            <a:cxnSpLocks/>
+            <a:stCxn id="68" idx="0"/>
+          </p:cNvCxnSpPr>
+          <p:nvPr/>
+        </p:nvCxnSpPr>
+        <p:spPr>
+          <a:xfrm flipH="1" flipV="1">
+            <a:off x="9392512" y="4646543"/>
+            <a:ext cx="8346" cy="421290"/>
+          </a:xfrm>
+          <a:prstGeom prst="line">
+            <a:avLst/>
+          </a:prstGeom>
+        </p:spPr>
+        <p:style>
+          <a:lnRef idx="1">
+            <a:schemeClr val="accent1"/>
+          </a:lnRef>
+          <a:fillRef idx="0">
+            <a:schemeClr val="accent1"/>
+          </a:fillRef>
+          <a:effectRef idx="0">
+            <a:schemeClr val="accent1"/>
+          </a:effectRef>
+          <a:fontRef idx="minor">
+            <a:schemeClr val="tx1"/>
+          </a:fontRef>
+        </p:style>
+      </p:cxnSp>
+      <p:cxnSp>
+        <p:nvCxnSpPr>
+          <p:cNvPr id="22" name="Gerader Verbinder 21">
+            <a:extLst>
+              <a:ext uri="{FF2B5EF4-FFF2-40B4-BE49-F238E27FC236}">
+                <a16:creationId xmlns:a16="http://schemas.microsoft.com/office/drawing/2014/main" id="{3D72E9B4-5209-77A2-4F04-552EEA44AE30}"/>
+              </a:ext>
+            </a:extLst>
+          </p:cNvPr>
+          <p:cNvCxnSpPr>
+            <a:cxnSpLocks/>
+          </p:cNvCxnSpPr>
+          <p:nvPr/>
+        </p:nvCxnSpPr>
+        <p:spPr>
+          <a:xfrm flipH="1" flipV="1">
+            <a:off x="1711655" y="2070317"/>
+            <a:ext cx="7233" cy="190861"/>
+          </a:xfrm>
+          <a:prstGeom prst="line">
+            <a:avLst/>
+          </a:prstGeom>
+        </p:spPr>
+        <p:style>
+          <a:lnRef idx="1">
+            <a:schemeClr val="accent1"/>
+          </a:lnRef>
+          <a:fillRef idx="0">
+            <a:schemeClr val="accent1"/>
+          </a:fillRef>
+          <a:effectRef idx="0">
+            <a:schemeClr val="accent1"/>
+          </a:effectRef>
+          <a:fontRef idx="minor">
+            <a:schemeClr val="tx1"/>
+          </a:fontRef>
+        </p:style>
+      </p:cxnSp>
+      <p:cxnSp>
+        <p:nvCxnSpPr>
+          <p:cNvPr id="11" name="Gerader Verbinder 10">
+            <a:extLst>
+              <a:ext uri="{FF2B5EF4-FFF2-40B4-BE49-F238E27FC236}">
+                <a16:creationId xmlns:a16="http://schemas.microsoft.com/office/drawing/2014/main" id="{1EF21D7A-BC5E-6369-9A40-3545AAAF417A}"/>
+              </a:ext>
+            </a:extLst>
+          </p:cNvPr>
+          <p:cNvCxnSpPr>
+            <a:cxnSpLocks/>
+          </p:cNvCxnSpPr>
+          <p:nvPr/>
+        </p:nvCxnSpPr>
+        <p:spPr>
+          <a:xfrm flipH="1" flipV="1">
+            <a:off x="4257982" y="2060786"/>
+            <a:ext cx="7233" cy="190861"/>
+          </a:xfrm>
+          <a:prstGeom prst="line">
+            <a:avLst/>
+          </a:prstGeom>
+        </p:spPr>
+        <p:style>
+          <a:lnRef idx="1">
+            <a:schemeClr val="accent1"/>
+          </a:lnRef>
+          <a:fillRef idx="0">
+            <a:schemeClr val="accent1"/>
+          </a:fillRef>
+          <a:effectRef idx="0">
+            <a:schemeClr val="accent1"/>
+          </a:effectRef>
+          <a:fontRef idx="minor">
+            <a:schemeClr val="tx1"/>
+          </a:fontRef>
+        </p:style>
+      </p:cxnSp>
+      <p:cxnSp>
+        <p:nvCxnSpPr>
           <p:cNvPr id="25" name="Gerader Verbinder 24">
             <a:extLst>
               <a:ext uri="{FF2B5EF4-FFF2-40B4-BE49-F238E27FC236}">
@@ -17245,6 +18027,1012 @@
           </a:prstGeom>
         </p:spPr>
       </p:pic>
+      <p:cxnSp>
+        <p:nvCxnSpPr>
+          <p:cNvPr id="23" name="Gerader Verbinder 22">
+            <a:extLst>
+              <a:ext uri="{FF2B5EF4-FFF2-40B4-BE49-F238E27FC236}">
+                <a16:creationId xmlns:a16="http://schemas.microsoft.com/office/drawing/2014/main" id="{1D3A9120-342A-A6CE-74C1-D289B6B59FA0}"/>
+              </a:ext>
+            </a:extLst>
+          </p:cNvPr>
+          <p:cNvCxnSpPr>
+            <a:cxnSpLocks/>
+          </p:cNvCxnSpPr>
+          <p:nvPr/>
+        </p:nvCxnSpPr>
+        <p:spPr>
+          <a:xfrm flipH="1" flipV="1">
+            <a:off x="6677720" y="4797617"/>
+            <a:ext cx="7233" cy="190861"/>
+          </a:xfrm>
+          <a:prstGeom prst="line">
+            <a:avLst/>
+          </a:prstGeom>
+        </p:spPr>
+        <p:style>
+          <a:lnRef idx="1">
+            <a:schemeClr val="accent1"/>
+          </a:lnRef>
+          <a:fillRef idx="0">
+            <a:schemeClr val="accent1"/>
+          </a:fillRef>
+          <a:effectRef idx="0">
+            <a:schemeClr val="accent1"/>
+          </a:effectRef>
+          <a:fontRef idx="minor">
+            <a:schemeClr val="tx1"/>
+          </a:fontRef>
+        </p:style>
+      </p:cxnSp>
+      <p:cxnSp>
+        <p:nvCxnSpPr>
+          <p:cNvPr id="30" name="Gerader Verbinder 29">
+            <a:extLst>
+              <a:ext uri="{FF2B5EF4-FFF2-40B4-BE49-F238E27FC236}">
+                <a16:creationId xmlns:a16="http://schemas.microsoft.com/office/drawing/2014/main" id="{B6CAC9F7-838B-1A06-6B51-4265E4B0DD08}"/>
+              </a:ext>
+            </a:extLst>
+          </p:cNvPr>
+          <p:cNvCxnSpPr>
+            <a:cxnSpLocks/>
+          </p:cNvCxnSpPr>
+          <p:nvPr/>
+        </p:nvCxnSpPr>
+        <p:spPr>
+          <a:xfrm flipV="1">
+            <a:off x="5390229" y="4407061"/>
+            <a:ext cx="5338" cy="50798"/>
+          </a:xfrm>
+          <a:prstGeom prst="line">
+            <a:avLst/>
+          </a:prstGeom>
+        </p:spPr>
+        <p:style>
+          <a:lnRef idx="1">
+            <a:schemeClr val="accent1"/>
+          </a:lnRef>
+          <a:fillRef idx="0">
+            <a:schemeClr val="accent1"/>
+          </a:fillRef>
+          <a:effectRef idx="0">
+            <a:schemeClr val="accent1"/>
+          </a:effectRef>
+          <a:fontRef idx="minor">
+            <a:schemeClr val="tx1"/>
+          </a:fontRef>
+        </p:style>
+      </p:cxnSp>
+      <p:cxnSp>
+        <p:nvCxnSpPr>
+          <p:cNvPr id="43" name="Gerader Verbinder 42">
+            <a:extLst>
+              <a:ext uri="{FF2B5EF4-FFF2-40B4-BE49-F238E27FC236}">
+                <a16:creationId xmlns:a16="http://schemas.microsoft.com/office/drawing/2014/main" id="{5CA5B796-0997-9311-B2BD-60E4CB5D8331}"/>
+              </a:ext>
+            </a:extLst>
+          </p:cNvPr>
+          <p:cNvCxnSpPr>
+            <a:cxnSpLocks/>
+          </p:cNvCxnSpPr>
+          <p:nvPr/>
+        </p:nvCxnSpPr>
+        <p:spPr>
+          <a:xfrm flipV="1">
+            <a:off x="5861167" y="4982406"/>
+            <a:ext cx="0" cy="202883"/>
+          </a:xfrm>
+          <a:prstGeom prst="line">
+            <a:avLst/>
+          </a:prstGeom>
+        </p:spPr>
+        <p:style>
+          <a:lnRef idx="1">
+            <a:schemeClr val="accent1"/>
+          </a:lnRef>
+          <a:fillRef idx="0">
+            <a:schemeClr val="accent1"/>
+          </a:fillRef>
+          <a:effectRef idx="0">
+            <a:schemeClr val="accent1"/>
+          </a:effectRef>
+          <a:fontRef idx="minor">
+            <a:schemeClr val="tx1"/>
+          </a:fontRef>
+        </p:style>
+      </p:cxnSp>
+      <p:cxnSp>
+        <p:nvCxnSpPr>
+          <p:cNvPr id="44" name="Gerader Verbinder 43">
+            <a:extLst>
+              <a:ext uri="{FF2B5EF4-FFF2-40B4-BE49-F238E27FC236}">
+                <a16:creationId xmlns:a16="http://schemas.microsoft.com/office/drawing/2014/main" id="{49EE8B51-9167-9FB0-3955-C597F2AF23D5}"/>
+              </a:ext>
+            </a:extLst>
+          </p:cNvPr>
+          <p:cNvCxnSpPr>
+            <a:cxnSpLocks/>
+          </p:cNvCxnSpPr>
+          <p:nvPr/>
+        </p:nvCxnSpPr>
+        <p:spPr>
+          <a:xfrm>
+            <a:off x="5704470" y="4982406"/>
+            <a:ext cx="1767062" cy="32084"/>
+          </a:xfrm>
+          <a:prstGeom prst="line">
+            <a:avLst/>
+          </a:prstGeom>
+        </p:spPr>
+        <p:style>
+          <a:lnRef idx="1">
+            <a:schemeClr val="accent1"/>
+          </a:lnRef>
+          <a:fillRef idx="0">
+            <a:schemeClr val="accent1"/>
+          </a:fillRef>
+          <a:effectRef idx="0">
+            <a:schemeClr val="accent1"/>
+          </a:effectRef>
+          <a:fontRef idx="minor">
+            <a:schemeClr val="tx1"/>
+          </a:fontRef>
+        </p:style>
+      </p:cxnSp>
+      <p:sp>
+        <p:nvSpPr>
+          <p:cNvPr id="45" name="Rechteck 44">
+            <a:extLst>
+              <a:ext uri="{FF2B5EF4-FFF2-40B4-BE49-F238E27FC236}">
+                <a16:creationId xmlns:a16="http://schemas.microsoft.com/office/drawing/2014/main" id="{0C217B39-3DB7-1BCC-DBB5-F7934B835FE0}"/>
+              </a:ext>
+            </a:extLst>
+          </p:cNvPr>
+          <p:cNvSpPr/>
+          <p:nvPr/>
+        </p:nvSpPr>
+        <p:spPr>
+          <a:xfrm>
+            <a:off x="5586500" y="4478463"/>
+            <a:ext cx="1908018" cy="375015"/>
+          </a:xfrm>
+          <a:prstGeom prst="rect">
+            <a:avLst/>
+          </a:prstGeom>
+          <a:solidFill>
+            <a:srgbClr val="FFFF00"/>
+          </a:solidFill>
+          <a:ln>
+            <a:solidFill>
+              <a:schemeClr val="tx1"/>
+            </a:solidFill>
+          </a:ln>
+        </p:spPr>
+        <p:style>
+          <a:lnRef idx="2">
+            <a:schemeClr val="accent1">
+              <a:shade val="50000"/>
+            </a:schemeClr>
+          </a:lnRef>
+          <a:fillRef idx="1">
+            <a:schemeClr val="accent1"/>
+          </a:fillRef>
+          <a:effectRef idx="0">
+            <a:schemeClr val="accent1"/>
+          </a:effectRef>
+          <a:fontRef idx="minor">
+            <a:schemeClr val="lt1"/>
+          </a:fontRef>
+        </p:style>
+        <p:txBody>
+          <a:bodyPr rtlCol="0" anchor="ctr"/>
+          <a:lstStyle/>
+          <a:p>
+            <a:pPr algn="ctr"/>
+            <a:r>
+              <a:rPr lang="de-CH" sz="1000" b="1" i="1" dirty="0">
+                <a:solidFill>
+                  <a:schemeClr val="tx1"/>
+                </a:solidFill>
+                <a:latin typeface="Arial" panose="020B0604020202020204" pitchFamily="34" charset="0"/>
+                <a:cs typeface="Arial" panose="020B0604020202020204" pitchFamily="34" charset="0"/>
+              </a:rPr>
+              <a:t>Tischplan/Layout</a:t>
+            </a:r>
+          </a:p>
+          <a:p>
+            <a:pPr algn="ctr"/>
+            <a:r>
+              <a:rPr lang="de-CH" sz="1000" b="1" dirty="0">
+                <a:solidFill>
+                  <a:schemeClr val="tx1"/>
+                </a:solidFill>
+                <a:latin typeface="Arial" panose="020B0604020202020204" pitchFamily="34" charset="0"/>
+                <a:cs typeface="Arial" panose="020B0604020202020204" pitchFamily="34" charset="0"/>
+              </a:rPr>
+              <a:t>Spagi_76_Chairs_V_2</a:t>
+            </a:r>
+          </a:p>
+        </p:txBody>
+      </p:sp>
+      <p:cxnSp>
+        <p:nvCxnSpPr>
+          <p:cNvPr id="60" name="Gerader Verbinder 59">
+            <a:extLst>
+              <a:ext uri="{FF2B5EF4-FFF2-40B4-BE49-F238E27FC236}">
+                <a16:creationId xmlns:a16="http://schemas.microsoft.com/office/drawing/2014/main" id="{EE3DE432-4510-37BB-8A08-099B39B006C6}"/>
+              </a:ext>
+            </a:extLst>
+          </p:cNvPr>
+          <p:cNvCxnSpPr>
+            <a:cxnSpLocks/>
+          </p:cNvCxnSpPr>
+          <p:nvPr/>
+        </p:nvCxnSpPr>
+        <p:spPr>
+          <a:xfrm flipH="1" flipV="1">
+            <a:off x="6035944" y="4998027"/>
+            <a:ext cx="7233" cy="190861"/>
+          </a:xfrm>
+          <a:prstGeom prst="line">
+            <a:avLst/>
+          </a:prstGeom>
+        </p:spPr>
+        <p:style>
+          <a:lnRef idx="1">
+            <a:schemeClr val="accent1"/>
+          </a:lnRef>
+          <a:fillRef idx="0">
+            <a:schemeClr val="accent1"/>
+          </a:fillRef>
+          <a:effectRef idx="0">
+            <a:schemeClr val="accent1"/>
+          </a:effectRef>
+          <a:fontRef idx="minor">
+            <a:schemeClr val="tx1"/>
+          </a:fontRef>
+        </p:style>
+      </p:cxnSp>
+      <p:cxnSp>
+        <p:nvCxnSpPr>
+          <p:cNvPr id="61" name="Gerader Verbinder 60">
+            <a:extLst>
+              <a:ext uri="{FF2B5EF4-FFF2-40B4-BE49-F238E27FC236}">
+                <a16:creationId xmlns:a16="http://schemas.microsoft.com/office/drawing/2014/main" id="{5EF68CB4-4B0C-2D7A-CD8D-13C46867023A}"/>
+              </a:ext>
+            </a:extLst>
+          </p:cNvPr>
+          <p:cNvCxnSpPr>
+            <a:cxnSpLocks/>
+          </p:cNvCxnSpPr>
+          <p:nvPr/>
+        </p:nvCxnSpPr>
+        <p:spPr>
+          <a:xfrm>
+            <a:off x="7234407" y="5015310"/>
+            <a:ext cx="0" cy="155510"/>
+          </a:xfrm>
+          <a:prstGeom prst="line">
+            <a:avLst/>
+          </a:prstGeom>
+        </p:spPr>
+        <p:style>
+          <a:lnRef idx="1">
+            <a:schemeClr val="accent1"/>
+          </a:lnRef>
+          <a:fillRef idx="0">
+            <a:schemeClr val="accent1"/>
+          </a:fillRef>
+          <a:effectRef idx="0">
+            <a:schemeClr val="accent1"/>
+          </a:effectRef>
+          <a:fontRef idx="minor">
+            <a:schemeClr val="tx1"/>
+          </a:fontRef>
+        </p:style>
+      </p:cxnSp>
+      <p:cxnSp>
+        <p:nvCxnSpPr>
+          <p:cNvPr id="64" name="Gerader Verbinder 63">
+            <a:extLst>
+              <a:ext uri="{FF2B5EF4-FFF2-40B4-BE49-F238E27FC236}">
+                <a16:creationId xmlns:a16="http://schemas.microsoft.com/office/drawing/2014/main" id="{9BF780EB-37E7-79DA-C680-E0F5A15D2285}"/>
+              </a:ext>
+            </a:extLst>
+          </p:cNvPr>
+          <p:cNvCxnSpPr>
+            <a:cxnSpLocks/>
+          </p:cNvCxnSpPr>
+          <p:nvPr/>
+        </p:nvCxnSpPr>
+        <p:spPr>
+          <a:xfrm flipV="1">
+            <a:off x="6553972" y="4998027"/>
+            <a:ext cx="0" cy="186192"/>
+          </a:xfrm>
+          <a:prstGeom prst="line">
+            <a:avLst/>
+          </a:prstGeom>
+        </p:spPr>
+        <p:style>
+          <a:lnRef idx="1">
+            <a:schemeClr val="accent1"/>
+          </a:lnRef>
+          <a:fillRef idx="0">
+            <a:schemeClr val="accent1"/>
+          </a:fillRef>
+          <a:effectRef idx="0">
+            <a:schemeClr val="accent1"/>
+          </a:effectRef>
+          <a:fontRef idx="minor">
+            <a:schemeClr val="tx1"/>
+          </a:fontRef>
+        </p:style>
+      </p:cxnSp>
+      <p:sp>
+        <p:nvSpPr>
+          <p:cNvPr id="65" name="Rechteck 64">
+            <a:extLst>
+              <a:ext uri="{FF2B5EF4-FFF2-40B4-BE49-F238E27FC236}">
+                <a16:creationId xmlns:a16="http://schemas.microsoft.com/office/drawing/2014/main" id="{3FD012B0-9888-E4B2-2BA9-97A9DB4B40A6}"/>
+              </a:ext>
+            </a:extLst>
+          </p:cNvPr>
+          <p:cNvSpPr/>
+          <p:nvPr/>
+        </p:nvSpPr>
+        <p:spPr>
+          <a:xfrm>
+            <a:off x="6173689" y="5188651"/>
+            <a:ext cx="891591" cy="273141"/>
+          </a:xfrm>
+          <a:prstGeom prst="rect">
+            <a:avLst/>
+          </a:prstGeom>
+          <a:solidFill>
+            <a:srgbClr val="FFFF00"/>
+          </a:solidFill>
+          <a:ln>
+            <a:solidFill>
+              <a:schemeClr val="tx1"/>
+            </a:solidFill>
+          </a:ln>
+        </p:spPr>
+        <p:style>
+          <a:lnRef idx="2">
+            <a:schemeClr val="accent1">
+              <a:shade val="50000"/>
+            </a:schemeClr>
+          </a:lnRef>
+          <a:fillRef idx="1">
+            <a:schemeClr val="accent1"/>
+          </a:fillRef>
+          <a:effectRef idx="0">
+            <a:schemeClr val="accent1"/>
+          </a:effectRef>
+          <a:fontRef idx="minor">
+            <a:schemeClr val="lt1"/>
+          </a:fontRef>
+        </p:style>
+        <p:txBody>
+          <a:bodyPr rtlCol="0" anchor="ctr"/>
+          <a:lstStyle/>
+          <a:p>
+            <a:pPr algn="ctr"/>
+            <a:r>
+              <a:rPr lang="de-CH" sz="1000" b="1">
+                <a:solidFill>
+                  <a:schemeClr val="tx1"/>
+                </a:solidFill>
+                <a:latin typeface="Arial" panose="020B0604020202020204" pitchFamily="34" charset="0"/>
+                <a:cs typeface="Arial" panose="020B0604020202020204" pitchFamily="34" charset="0"/>
+              </a:rPr>
+              <a:t>SaisonXML</a:t>
+            </a:r>
+            <a:endParaRPr lang="de-CH" sz="1000" b="1" dirty="0">
+              <a:solidFill>
+                <a:schemeClr val="tx1"/>
+              </a:solidFill>
+              <a:latin typeface="Arial" panose="020B0604020202020204" pitchFamily="34" charset="0"/>
+              <a:cs typeface="Arial" panose="020B0604020202020204" pitchFamily="34" charset="0"/>
+            </a:endParaRPr>
+          </a:p>
+        </p:txBody>
+      </p:sp>
+      <p:sp>
+        <p:nvSpPr>
+          <p:cNvPr id="66" name="Textfeld 65">
+            <a:extLst>
+              <a:ext uri="{FF2B5EF4-FFF2-40B4-BE49-F238E27FC236}">
+                <a16:creationId xmlns:a16="http://schemas.microsoft.com/office/drawing/2014/main" id="{6C4EF191-F50B-F4A3-6B4C-A2E8A7C5B214}"/>
+              </a:ext>
+            </a:extLst>
+          </p:cNvPr>
+          <p:cNvSpPr txBox="1"/>
+          <p:nvPr/>
+        </p:nvSpPr>
+        <p:spPr>
+          <a:xfrm>
+            <a:off x="5904712" y="5490746"/>
+            <a:ext cx="1377072" cy="338554"/>
+          </a:xfrm>
+          <a:prstGeom prst="rect">
+            <a:avLst/>
+          </a:prstGeom>
+          <a:noFill/>
+        </p:spPr>
+        <p:txBody>
+          <a:bodyPr wrap="square" rtlCol="0">
+            <a:spAutoFit/>
+          </a:bodyPr>
+          <a:lstStyle/>
+          <a:p>
+            <a:pPr algn="ctr"/>
+            <a:r>
+              <a:rPr lang="de-CH" sz="800" b="1" dirty="0">
+                <a:latin typeface="Aptos Narrow" panose="020B0004020202020204" pitchFamily="34" charset="0"/>
+              </a:rPr>
+              <a:t>Event </a:t>
+            </a:r>
+            <a:r>
+              <a:rPr lang="de-CH" sz="800" b="1" dirty="0" err="1">
+                <a:latin typeface="Aptos Narrow" panose="020B0004020202020204" pitchFamily="34" charset="0"/>
+              </a:rPr>
+              <a:t>program</a:t>
+            </a:r>
+            <a:r>
+              <a:rPr lang="de-CH" sz="800" b="1" dirty="0">
+                <a:latin typeface="Aptos Narrow" panose="020B0004020202020204" pitchFamily="34" charset="0"/>
+              </a:rPr>
+              <a:t> XML </a:t>
+            </a:r>
+            <a:r>
+              <a:rPr lang="de-CH" sz="800" b="1" dirty="0" err="1">
+                <a:latin typeface="Aptos Narrow" panose="020B0004020202020204" pitchFamily="34" charset="0"/>
+              </a:rPr>
+              <a:t>file</a:t>
+            </a:r>
+            <a:endParaRPr lang="de-CH" sz="800" b="1" dirty="0">
+              <a:latin typeface="Aptos Narrow" panose="020B0004020202020204" pitchFamily="34" charset="0"/>
+            </a:endParaRPr>
+          </a:p>
+          <a:p>
+            <a:pPr algn="ctr"/>
+            <a:r>
+              <a:rPr lang="de-CH" sz="800" b="1" dirty="0">
+                <a:latin typeface="Aptos Narrow" panose="020B0004020202020204" pitchFamily="34" charset="0"/>
+              </a:rPr>
+              <a:t>Event </a:t>
+            </a:r>
+            <a:r>
+              <a:rPr lang="de-CH" sz="800" b="1" dirty="0" err="1">
+                <a:latin typeface="Aptos Narrow" panose="020B0004020202020204" pitchFamily="34" charset="0"/>
+              </a:rPr>
+              <a:t>reservation</a:t>
+            </a:r>
+            <a:r>
+              <a:rPr lang="de-CH" sz="800" b="1" dirty="0">
+                <a:latin typeface="Aptos Narrow" panose="020B0004020202020204" pitchFamily="34" charset="0"/>
+              </a:rPr>
+              <a:t> XML </a:t>
+            </a:r>
+            <a:r>
+              <a:rPr lang="de-CH" sz="800" b="1" dirty="0" err="1">
+                <a:latin typeface="Aptos Narrow" panose="020B0004020202020204" pitchFamily="34" charset="0"/>
+              </a:rPr>
+              <a:t>files</a:t>
+            </a:r>
+            <a:endParaRPr lang="de-CH" sz="800" b="1" dirty="0">
+              <a:latin typeface="Aptos Narrow" panose="020B0004020202020204" pitchFamily="34" charset="0"/>
+            </a:endParaRPr>
+          </a:p>
+        </p:txBody>
+      </p:sp>
+      <p:sp>
+        <p:nvSpPr>
+          <p:cNvPr id="67" name="Flussdiagramm: Karte 66">
+            <a:extLst>
+              <a:ext uri="{FF2B5EF4-FFF2-40B4-BE49-F238E27FC236}">
+                <a16:creationId xmlns:a16="http://schemas.microsoft.com/office/drawing/2014/main" id="{7E6DF4BC-5D88-B361-75B8-7C4CACE1195C}"/>
+              </a:ext>
+            </a:extLst>
+          </p:cNvPr>
+          <p:cNvSpPr/>
+          <p:nvPr/>
+        </p:nvSpPr>
+        <p:spPr>
+          <a:xfrm>
+            <a:off x="9369054" y="5610027"/>
+            <a:ext cx="1041878" cy="138835"/>
+          </a:xfrm>
+          <a:prstGeom prst="flowChartPunchedCard">
+            <a:avLst/>
+          </a:prstGeom>
+          <a:solidFill>
+            <a:srgbClr val="FFFF00"/>
+          </a:solidFill>
+          <a:ln>
+            <a:solidFill>
+              <a:schemeClr val="tx1"/>
+            </a:solidFill>
+          </a:ln>
+        </p:spPr>
+        <p:style>
+          <a:lnRef idx="2">
+            <a:schemeClr val="accent1">
+              <a:shade val="50000"/>
+            </a:schemeClr>
+          </a:lnRef>
+          <a:fillRef idx="1">
+            <a:schemeClr val="accent1"/>
+          </a:fillRef>
+          <a:effectRef idx="0">
+            <a:schemeClr val="accent1"/>
+          </a:effectRef>
+          <a:fontRef idx="minor">
+            <a:schemeClr val="lt1"/>
+          </a:fontRef>
+        </p:style>
+        <p:txBody>
+          <a:bodyPr rtlCol="0" anchor="ctr"/>
+          <a:lstStyle/>
+          <a:p>
+            <a:pPr algn="ctr"/>
+            <a:r>
+              <a:rPr lang="de-CH" sz="800" b="1" dirty="0">
+                <a:solidFill>
+                  <a:schemeClr val="tx1"/>
+                </a:solidFill>
+                <a:latin typeface="Arial" panose="020B0604020202020204" pitchFamily="34" charset="0"/>
+                <a:cs typeface="Arial" panose="020B0604020202020204" pitchFamily="34" charset="0"/>
+              </a:rPr>
+              <a:t>ShowLayout.htm</a:t>
+            </a:r>
+          </a:p>
+        </p:txBody>
+      </p:sp>
+      <p:sp>
+        <p:nvSpPr>
+          <p:cNvPr id="68" name="Flussdiagramm: Karte 67">
+            <a:extLst>
+              <a:ext uri="{FF2B5EF4-FFF2-40B4-BE49-F238E27FC236}">
+                <a16:creationId xmlns:a16="http://schemas.microsoft.com/office/drawing/2014/main" id="{B4696D59-26C6-422E-DDAD-8ADDBF3F27BA}"/>
+              </a:ext>
+            </a:extLst>
+          </p:cNvPr>
+          <p:cNvSpPr/>
+          <p:nvPr/>
+        </p:nvSpPr>
+        <p:spPr>
+          <a:xfrm>
+            <a:off x="8710418" y="5067833"/>
+            <a:ext cx="1380879" cy="138170"/>
+          </a:xfrm>
+          <a:prstGeom prst="flowChartPunchedCard">
+            <a:avLst/>
+          </a:prstGeom>
+          <a:solidFill>
+            <a:srgbClr val="FFFF00"/>
+          </a:solidFill>
+          <a:ln>
+            <a:solidFill>
+              <a:schemeClr val="tx1"/>
+            </a:solidFill>
+          </a:ln>
+        </p:spPr>
+        <p:style>
+          <a:lnRef idx="2">
+            <a:schemeClr val="accent1">
+              <a:shade val="50000"/>
+            </a:schemeClr>
+          </a:lnRef>
+          <a:fillRef idx="1">
+            <a:schemeClr val="accent1"/>
+          </a:fillRef>
+          <a:effectRef idx="0">
+            <a:schemeClr val="accent1"/>
+          </a:effectRef>
+          <a:fontRef idx="minor">
+            <a:schemeClr val="lt1"/>
+          </a:fontRef>
+        </p:style>
+        <p:txBody>
+          <a:bodyPr rtlCol="0" anchor="ctr"/>
+          <a:lstStyle/>
+          <a:p>
+            <a:pPr algn="ctr"/>
+            <a:r>
+              <a:rPr lang="de-CH" sz="800" b="1" dirty="0">
+                <a:solidFill>
+                  <a:schemeClr val="tx1"/>
+                </a:solidFill>
+                <a:latin typeface="Arial" panose="020B0604020202020204" pitchFamily="34" charset="0"/>
+                <a:cs typeface="Arial" panose="020B0604020202020204" pitchFamily="34" charset="0"/>
+              </a:rPr>
+              <a:t>MakeReservation.htm </a:t>
+            </a:r>
+          </a:p>
+        </p:txBody>
+      </p:sp>
+      <p:sp>
+        <p:nvSpPr>
+          <p:cNvPr id="69" name="Flussdiagramm: Karte 68">
+            <a:extLst>
+              <a:ext uri="{FF2B5EF4-FFF2-40B4-BE49-F238E27FC236}">
+                <a16:creationId xmlns:a16="http://schemas.microsoft.com/office/drawing/2014/main" id="{A7D4734F-7754-609E-DEDE-E697EF92ECD7}"/>
+              </a:ext>
+            </a:extLst>
+          </p:cNvPr>
+          <p:cNvSpPr/>
+          <p:nvPr/>
+        </p:nvSpPr>
+        <p:spPr>
+          <a:xfrm>
+            <a:off x="8869606" y="5268582"/>
+            <a:ext cx="1272456" cy="138170"/>
+          </a:xfrm>
+          <a:prstGeom prst="flowChartPunchedCard">
+            <a:avLst/>
+          </a:prstGeom>
+          <a:solidFill>
+            <a:srgbClr val="FFFF00"/>
+          </a:solidFill>
+          <a:ln>
+            <a:solidFill>
+              <a:schemeClr val="tx1"/>
+            </a:solidFill>
+          </a:ln>
+        </p:spPr>
+        <p:style>
+          <a:lnRef idx="2">
+            <a:schemeClr val="accent1">
+              <a:shade val="50000"/>
+            </a:schemeClr>
+          </a:lnRef>
+          <a:fillRef idx="1">
+            <a:schemeClr val="accent1"/>
+          </a:fillRef>
+          <a:effectRef idx="0">
+            <a:schemeClr val="accent1"/>
+          </a:effectRef>
+          <a:fontRef idx="minor">
+            <a:schemeClr val="lt1"/>
+          </a:fontRef>
+        </p:style>
+        <p:txBody>
+          <a:bodyPr rtlCol="0" anchor="ctr"/>
+          <a:lstStyle/>
+          <a:p>
+            <a:pPr algn="ctr"/>
+            <a:r>
+              <a:rPr lang="de-CH" sz="800" b="1" dirty="0">
+                <a:solidFill>
+                  <a:schemeClr val="tx1"/>
+                </a:solidFill>
+                <a:latin typeface="Arial" panose="020B0604020202020204" pitchFamily="34" charset="0"/>
+                <a:cs typeface="Arial" panose="020B0604020202020204" pitchFamily="34" charset="0"/>
+              </a:rPr>
+              <a:t>AddReservation.htm</a:t>
+            </a:r>
+          </a:p>
+        </p:txBody>
+      </p:sp>
+      <p:sp>
+        <p:nvSpPr>
+          <p:cNvPr id="70" name="Flussdiagramm: Karte 69">
+            <a:extLst>
+              <a:ext uri="{FF2B5EF4-FFF2-40B4-BE49-F238E27FC236}">
+                <a16:creationId xmlns:a16="http://schemas.microsoft.com/office/drawing/2014/main" id="{BCA66D81-464A-A462-6305-9D3988EEF71B}"/>
+              </a:ext>
+            </a:extLst>
+          </p:cNvPr>
+          <p:cNvSpPr/>
+          <p:nvPr/>
+        </p:nvSpPr>
+        <p:spPr>
+          <a:xfrm>
+            <a:off x="8947741" y="5452846"/>
+            <a:ext cx="1338929" cy="120923"/>
+          </a:xfrm>
+          <a:prstGeom prst="flowChartPunchedCard">
+            <a:avLst/>
+          </a:prstGeom>
+          <a:solidFill>
+            <a:srgbClr val="FFFF00"/>
+          </a:solidFill>
+          <a:ln>
+            <a:solidFill>
+              <a:schemeClr val="tx1"/>
+            </a:solidFill>
+          </a:ln>
+        </p:spPr>
+        <p:style>
+          <a:lnRef idx="2">
+            <a:schemeClr val="accent1">
+              <a:shade val="50000"/>
+            </a:schemeClr>
+          </a:lnRef>
+          <a:fillRef idx="1">
+            <a:schemeClr val="accent1"/>
+          </a:fillRef>
+          <a:effectRef idx="0">
+            <a:schemeClr val="accent1"/>
+          </a:effectRef>
+          <a:fontRef idx="minor">
+            <a:schemeClr val="lt1"/>
+          </a:fontRef>
+        </p:style>
+        <p:txBody>
+          <a:bodyPr rtlCol="0" anchor="ctr"/>
+          <a:lstStyle/>
+          <a:p>
+            <a:pPr algn="ctr"/>
+            <a:r>
+              <a:rPr lang="de-CH" sz="800" b="1" dirty="0">
+                <a:solidFill>
+                  <a:schemeClr val="tx1"/>
+                </a:solidFill>
+                <a:latin typeface="Arial" panose="020B0604020202020204" pitchFamily="34" charset="0"/>
+                <a:cs typeface="Arial" panose="020B0604020202020204" pitchFamily="34" charset="0"/>
+              </a:rPr>
+              <a:t>SearchReservation.htm</a:t>
+            </a:r>
+          </a:p>
+        </p:txBody>
+      </p:sp>
+      <p:sp>
+        <p:nvSpPr>
+          <p:cNvPr id="71" name="Flussdiagramm: Karte 70">
+            <a:extLst>
+              <a:ext uri="{FF2B5EF4-FFF2-40B4-BE49-F238E27FC236}">
+                <a16:creationId xmlns:a16="http://schemas.microsoft.com/office/drawing/2014/main" id="{8AD338E0-9208-E12D-FB81-0D69958D75E6}"/>
+              </a:ext>
+            </a:extLst>
+          </p:cNvPr>
+          <p:cNvSpPr/>
+          <p:nvPr/>
+        </p:nvSpPr>
+        <p:spPr>
+          <a:xfrm>
+            <a:off x="8496401" y="4848758"/>
+            <a:ext cx="1380879" cy="138170"/>
+          </a:xfrm>
+          <a:prstGeom prst="flowChartPunchedCard">
+            <a:avLst/>
+          </a:prstGeom>
+          <a:solidFill>
+            <a:srgbClr val="FFFF00"/>
+          </a:solidFill>
+          <a:ln>
+            <a:solidFill>
+              <a:schemeClr val="tx1"/>
+            </a:solidFill>
+          </a:ln>
+        </p:spPr>
+        <p:style>
+          <a:lnRef idx="2">
+            <a:schemeClr val="accent1">
+              <a:shade val="50000"/>
+            </a:schemeClr>
+          </a:lnRef>
+          <a:fillRef idx="1">
+            <a:schemeClr val="accent1"/>
+          </a:fillRef>
+          <a:effectRef idx="0">
+            <a:schemeClr val="accent1"/>
+          </a:effectRef>
+          <a:fontRef idx="minor">
+            <a:schemeClr val="lt1"/>
+          </a:fontRef>
+        </p:style>
+        <p:txBody>
+          <a:bodyPr rtlCol="0" anchor="ctr"/>
+          <a:lstStyle/>
+          <a:p>
+            <a:pPr algn="ctr"/>
+            <a:r>
+              <a:rPr lang="de-CH" sz="800" b="1" dirty="0">
+                <a:solidFill>
+                  <a:schemeClr val="tx1"/>
+                </a:solidFill>
+                <a:latin typeface="Arial" panose="020B0604020202020204" pitchFamily="34" charset="0"/>
+                <a:cs typeface="Arial" panose="020B0604020202020204" pitchFamily="34" charset="0"/>
+              </a:rPr>
+              <a:t>EventReservation.htm </a:t>
+            </a:r>
+          </a:p>
+        </p:txBody>
+      </p:sp>
+      <p:cxnSp>
+        <p:nvCxnSpPr>
+          <p:cNvPr id="72" name="Gerader Verbinder 71">
+            <a:extLst>
+              <a:ext uri="{FF2B5EF4-FFF2-40B4-BE49-F238E27FC236}">
+                <a16:creationId xmlns:a16="http://schemas.microsoft.com/office/drawing/2014/main" id="{0A01CC40-A9CD-C616-2039-B7B4CF1B3BE5}"/>
+              </a:ext>
+            </a:extLst>
+          </p:cNvPr>
+          <p:cNvCxnSpPr>
+            <a:cxnSpLocks/>
+          </p:cNvCxnSpPr>
+          <p:nvPr/>
+        </p:nvCxnSpPr>
+        <p:spPr>
+          <a:xfrm flipH="1" flipV="1">
+            <a:off x="9348674" y="4455867"/>
+            <a:ext cx="7233" cy="190861"/>
+          </a:xfrm>
+          <a:prstGeom prst="line">
+            <a:avLst/>
+          </a:prstGeom>
+        </p:spPr>
+        <p:style>
+          <a:lnRef idx="1">
+            <a:schemeClr val="accent1"/>
+          </a:lnRef>
+          <a:fillRef idx="0">
+            <a:schemeClr val="accent1"/>
+          </a:fillRef>
+          <a:effectRef idx="0">
+            <a:schemeClr val="accent1"/>
+          </a:effectRef>
+          <a:fontRef idx="minor">
+            <a:schemeClr val="tx1"/>
+          </a:fontRef>
+        </p:style>
+      </p:cxnSp>
+      <p:cxnSp>
+        <p:nvCxnSpPr>
+          <p:cNvPr id="74" name="Gerader Verbinder 73">
+            <a:extLst>
+              <a:ext uri="{FF2B5EF4-FFF2-40B4-BE49-F238E27FC236}">
+                <a16:creationId xmlns:a16="http://schemas.microsoft.com/office/drawing/2014/main" id="{5A056AA1-C520-8934-1B79-647E611920CF}"/>
+              </a:ext>
+            </a:extLst>
+          </p:cNvPr>
+          <p:cNvCxnSpPr>
+            <a:cxnSpLocks/>
+          </p:cNvCxnSpPr>
+          <p:nvPr/>
+        </p:nvCxnSpPr>
+        <p:spPr>
+          <a:xfrm>
+            <a:off x="8973356" y="4646543"/>
+            <a:ext cx="1173297" cy="0"/>
+          </a:xfrm>
+          <a:prstGeom prst="line">
+            <a:avLst/>
+          </a:prstGeom>
+        </p:spPr>
+        <p:style>
+          <a:lnRef idx="1">
+            <a:schemeClr val="accent1"/>
+          </a:lnRef>
+          <a:fillRef idx="0">
+            <a:schemeClr val="accent1"/>
+          </a:fillRef>
+          <a:effectRef idx="0">
+            <a:schemeClr val="accent1"/>
+          </a:effectRef>
+          <a:fontRef idx="minor">
+            <a:schemeClr val="tx1"/>
+          </a:fontRef>
+        </p:style>
+      </p:cxnSp>
+      <p:sp>
+        <p:nvSpPr>
+          <p:cNvPr id="75" name="Rechteck 74">
+            <a:extLst>
+              <a:ext uri="{FF2B5EF4-FFF2-40B4-BE49-F238E27FC236}">
+                <a16:creationId xmlns:a16="http://schemas.microsoft.com/office/drawing/2014/main" id="{0E52EE55-829F-93F3-D124-623DA3EEDE08}"/>
+              </a:ext>
+            </a:extLst>
+          </p:cNvPr>
+          <p:cNvSpPr/>
+          <p:nvPr/>
+        </p:nvSpPr>
+        <p:spPr>
+          <a:xfrm>
+            <a:off x="8472824" y="4129651"/>
+            <a:ext cx="1908018" cy="375015"/>
+          </a:xfrm>
+          <a:prstGeom prst="rect">
+            <a:avLst/>
+          </a:prstGeom>
+          <a:solidFill>
+            <a:srgbClr val="FFFF00"/>
+          </a:solidFill>
+          <a:ln>
+            <a:solidFill>
+              <a:schemeClr val="tx1"/>
+            </a:solidFill>
+          </a:ln>
+        </p:spPr>
+        <p:style>
+          <a:lnRef idx="2">
+            <a:schemeClr val="accent1">
+              <a:shade val="50000"/>
+            </a:schemeClr>
+          </a:lnRef>
+          <a:fillRef idx="1">
+            <a:schemeClr val="accent1"/>
+          </a:fillRef>
+          <a:effectRef idx="0">
+            <a:schemeClr val="accent1"/>
+          </a:effectRef>
+          <a:fontRef idx="minor">
+            <a:schemeClr val="lt1"/>
+          </a:fontRef>
+        </p:style>
+        <p:txBody>
+          <a:bodyPr rtlCol="0" anchor="ctr"/>
+          <a:lstStyle/>
+          <a:p>
+            <a:pPr algn="ctr"/>
+            <a:r>
+              <a:rPr lang="de-CH" sz="1000" b="1" i="1" dirty="0">
+                <a:solidFill>
+                  <a:schemeClr val="tx1"/>
+                </a:solidFill>
+                <a:latin typeface="Arial" panose="020B0604020202020204" pitchFamily="34" charset="0"/>
+                <a:cs typeface="Arial" panose="020B0604020202020204" pitchFamily="34" charset="0"/>
+              </a:rPr>
+              <a:t>Tischplan/Layout</a:t>
+            </a:r>
+          </a:p>
+          <a:p>
+            <a:pPr algn="ctr"/>
+            <a:r>
+              <a:rPr lang="de-CH" sz="1000" b="1" dirty="0">
+                <a:solidFill>
+                  <a:schemeClr val="tx1"/>
+                </a:solidFill>
+                <a:latin typeface="Arial" panose="020B0604020202020204" pitchFamily="34" charset="0"/>
+                <a:cs typeface="Arial" panose="020B0604020202020204" pitchFamily="34" charset="0"/>
+              </a:rPr>
+              <a:t>Spagi_76_Chairs_V_2</a:t>
+            </a:r>
+          </a:p>
+        </p:txBody>
+      </p:sp>
+      <p:cxnSp>
+        <p:nvCxnSpPr>
+          <p:cNvPr id="78" name="Gerader Verbinder 77">
+            <a:extLst>
+              <a:ext uri="{FF2B5EF4-FFF2-40B4-BE49-F238E27FC236}">
+                <a16:creationId xmlns:a16="http://schemas.microsoft.com/office/drawing/2014/main" id="{B89ADD1B-B55A-26A2-3091-B8CF1186BC34}"/>
+              </a:ext>
+            </a:extLst>
+          </p:cNvPr>
+          <p:cNvCxnSpPr>
+            <a:cxnSpLocks/>
+          </p:cNvCxnSpPr>
+          <p:nvPr/>
+        </p:nvCxnSpPr>
+        <p:spPr>
+          <a:xfrm flipV="1">
+            <a:off x="9224926" y="4649215"/>
+            <a:ext cx="0" cy="186192"/>
+          </a:xfrm>
+          <a:prstGeom prst="line">
+            <a:avLst/>
+          </a:prstGeom>
+        </p:spPr>
+        <p:style>
+          <a:lnRef idx="1">
+            <a:schemeClr val="accent1"/>
+          </a:lnRef>
+          <a:fillRef idx="0">
+            <a:schemeClr val="accent1"/>
+          </a:fillRef>
+          <a:effectRef idx="0">
+            <a:schemeClr val="accent1"/>
+          </a:effectRef>
+          <a:fontRef idx="minor">
+            <a:schemeClr val="tx1"/>
+          </a:fontRef>
+        </p:style>
+      </p:cxnSp>
     </p:spTree>
     <p:extLst>
       <p:ext uri="{BB962C8B-B14F-4D97-AF65-F5344CB8AC3E}">

--- a/Description/ResrvationNewLayout.pptx
+++ b/Description/ResrvationNewLayout.pptx
@@ -279,7 +279,7 @@
           <a:p>
             <a:fld id="{DDCE6D58-9B57-4731-A47B-3CD41B48F0A9}" type="datetimeFigureOut">
               <a:rPr lang="de-CH" smtClean="0"/>
-              <a:t>08.04.2026</a:t>
+              <a:t>16.04.2026</a:t>
             </a:fld>
             <a:endParaRPr lang="de-CH"/>
           </a:p>
@@ -449,7 +449,7 @@
           <a:p>
             <a:fld id="{DDCE6D58-9B57-4731-A47B-3CD41B48F0A9}" type="datetimeFigureOut">
               <a:rPr lang="de-CH" smtClean="0"/>
-              <a:t>08.04.2026</a:t>
+              <a:t>16.04.2026</a:t>
             </a:fld>
             <a:endParaRPr lang="de-CH"/>
           </a:p>
@@ -629,7 +629,7 @@
           <a:p>
             <a:fld id="{DDCE6D58-9B57-4731-A47B-3CD41B48F0A9}" type="datetimeFigureOut">
               <a:rPr lang="de-CH" smtClean="0"/>
-              <a:t>08.04.2026</a:t>
+              <a:t>16.04.2026</a:t>
             </a:fld>
             <a:endParaRPr lang="de-CH"/>
           </a:p>
@@ -799,7 +799,7 @@
           <a:p>
             <a:fld id="{DDCE6D58-9B57-4731-A47B-3CD41B48F0A9}" type="datetimeFigureOut">
               <a:rPr lang="de-CH" smtClean="0"/>
-              <a:t>08.04.2026</a:t>
+              <a:t>16.04.2026</a:t>
             </a:fld>
             <a:endParaRPr lang="de-CH"/>
           </a:p>
@@ -1045,7 +1045,7 @@
           <a:p>
             <a:fld id="{DDCE6D58-9B57-4731-A47B-3CD41B48F0A9}" type="datetimeFigureOut">
               <a:rPr lang="de-CH" smtClean="0"/>
-              <a:t>08.04.2026</a:t>
+              <a:t>16.04.2026</a:t>
             </a:fld>
             <a:endParaRPr lang="de-CH"/>
           </a:p>
@@ -1277,7 +1277,7 @@
           <a:p>
             <a:fld id="{DDCE6D58-9B57-4731-A47B-3CD41B48F0A9}" type="datetimeFigureOut">
               <a:rPr lang="de-CH" smtClean="0"/>
-              <a:t>08.04.2026</a:t>
+              <a:t>16.04.2026</a:t>
             </a:fld>
             <a:endParaRPr lang="de-CH"/>
           </a:p>
@@ -1644,7 +1644,7 @@
           <a:p>
             <a:fld id="{DDCE6D58-9B57-4731-A47B-3CD41B48F0A9}" type="datetimeFigureOut">
               <a:rPr lang="de-CH" smtClean="0"/>
-              <a:t>08.04.2026</a:t>
+              <a:t>16.04.2026</a:t>
             </a:fld>
             <a:endParaRPr lang="de-CH"/>
           </a:p>
@@ -1762,7 +1762,7 @@
           <a:p>
             <a:fld id="{DDCE6D58-9B57-4731-A47B-3CD41B48F0A9}" type="datetimeFigureOut">
               <a:rPr lang="de-CH" smtClean="0"/>
-              <a:t>08.04.2026</a:t>
+              <a:t>16.04.2026</a:t>
             </a:fld>
             <a:endParaRPr lang="de-CH"/>
           </a:p>
@@ -1857,7 +1857,7 @@
           <a:p>
             <a:fld id="{DDCE6D58-9B57-4731-A47B-3CD41B48F0A9}" type="datetimeFigureOut">
               <a:rPr lang="de-CH" smtClean="0"/>
-              <a:t>08.04.2026</a:t>
+              <a:t>16.04.2026</a:t>
             </a:fld>
             <a:endParaRPr lang="de-CH"/>
           </a:p>
@@ -2134,7 +2134,7 @@
           <a:p>
             <a:fld id="{DDCE6D58-9B57-4731-A47B-3CD41B48F0A9}" type="datetimeFigureOut">
               <a:rPr lang="de-CH" smtClean="0"/>
-              <a:t>08.04.2026</a:t>
+              <a:t>16.04.2026</a:t>
             </a:fld>
             <a:endParaRPr lang="de-CH"/>
           </a:p>
@@ -2387,7 +2387,7 @@
           <a:p>
             <a:fld id="{DDCE6D58-9B57-4731-A47B-3CD41B48F0A9}" type="datetimeFigureOut">
               <a:rPr lang="de-CH" smtClean="0"/>
-              <a:t>08.04.2026</a:t>
+              <a:t>16.04.2026</a:t>
             </a:fld>
             <a:endParaRPr lang="de-CH"/>
           </a:p>
@@ -2600,7 +2600,7 @@
           <a:p>
             <a:fld id="{DDCE6D58-9B57-4731-A47B-3CD41B48F0A9}" type="datetimeFigureOut">
               <a:rPr lang="de-CH" smtClean="0"/>
-              <a:t>08.04.2026</a:t>
+              <a:t>16.04.2026</a:t>
             </a:fld>
             <a:endParaRPr lang="de-CH"/>
           </a:p>
@@ -3019,8 +3019,8 @@
         </p:nvSpPr>
         <p:spPr>
           <a:xfrm>
-            <a:off x="512481" y="822337"/>
-            <a:ext cx="1794105" cy="523220"/>
+            <a:off x="3327951" y="470637"/>
+            <a:ext cx="1794105" cy="461665"/>
           </a:xfrm>
           <a:prstGeom prst="rect">
             <a:avLst/>
@@ -3035,7 +3035,7 @@
           <a:p>
             <a:pPr algn="ctr"/>
             <a:r>
-              <a:rPr lang="de-CH" sz="2800" b="1" dirty="0">
+              <a:rPr lang="de-CH" sz="2400" b="1" dirty="0">
                 <a:latin typeface="Arial Black" panose="020B0A04020102020204" pitchFamily="34" charset="0"/>
               </a:rPr>
               <a:t>Intranet</a:t>
@@ -3072,7 +3072,7 @@
         </p:blipFill>
         <p:spPr bwMode="auto">
           <a:xfrm>
-            <a:off x="707281" y="1345558"/>
+            <a:off x="3522751" y="932302"/>
             <a:ext cx="1451034" cy="1089888"/>
           </a:xfrm>
           <a:prstGeom prst="rect">
@@ -3090,12 +3090,207 @@
           </a:extLst>
         </p:spPr>
       </p:pic>
+      <p:sp>
+        <p:nvSpPr>
+          <p:cNvPr id="3" name="Rechteck: eine Ecke abgeschnitten 2">
+            <a:extLst>
+              <a:ext uri="{FF2B5EF4-FFF2-40B4-BE49-F238E27FC236}">
+                <a16:creationId xmlns:a16="http://schemas.microsoft.com/office/drawing/2014/main" id="{3D6A2AC0-443D-170A-283D-AECFDB8A6FD0}"/>
+              </a:ext>
+            </a:extLst>
+          </p:cNvPr>
+          <p:cNvSpPr/>
+          <p:nvPr/>
+        </p:nvSpPr>
+        <p:spPr>
+          <a:xfrm>
+            <a:off x="1433950" y="602669"/>
+            <a:ext cx="1069163" cy="1419521"/>
+          </a:xfrm>
+          <a:prstGeom prst="snip1Rect">
+            <a:avLst/>
+          </a:prstGeom>
+          <a:noFill/>
+          <a:ln>
+            <a:solidFill>
+              <a:schemeClr val="tx1"/>
+            </a:solidFill>
+          </a:ln>
+        </p:spPr>
+        <p:style>
+          <a:lnRef idx="2">
+            <a:schemeClr val="accent1">
+              <a:shade val="15000"/>
+            </a:schemeClr>
+          </a:lnRef>
+          <a:fillRef idx="1">
+            <a:schemeClr val="accent1"/>
+          </a:fillRef>
+          <a:effectRef idx="0">
+            <a:schemeClr val="accent1"/>
+          </a:effectRef>
+          <a:fontRef idx="minor">
+            <a:schemeClr val="lt1"/>
+          </a:fontRef>
+        </p:style>
+        <p:txBody>
+          <a:bodyPr rtlCol="0" anchor="ctr"/>
+          <a:lstStyle/>
+          <a:p>
+            <a:pPr algn="ctr"/>
+            <a:endParaRPr lang="de-CH" b="1" dirty="0">
+              <a:solidFill>
+                <a:schemeClr val="tx1"/>
+              </a:solidFill>
+              <a:latin typeface="Arial" panose="020B0604020202020204" pitchFamily="34" charset="0"/>
+              <a:cs typeface="Arial" panose="020B0604020202020204" pitchFamily="34" charset="0"/>
+            </a:endParaRPr>
+          </a:p>
+          <a:p>
+            <a:pPr algn="ctr"/>
+            <a:r>
+              <a:rPr lang="de-CH" b="1" dirty="0">
+                <a:solidFill>
+                  <a:schemeClr val="tx1"/>
+                </a:solidFill>
+                <a:latin typeface="Arial" panose="020B0604020202020204" pitchFamily="34" charset="0"/>
+                <a:cs typeface="Arial" panose="020B0604020202020204" pitchFamily="34" charset="0"/>
+              </a:rPr>
+              <a:t>Layout XML Datei</a:t>
+            </a:r>
+          </a:p>
+          <a:p>
+            <a:pPr algn="ctr"/>
+            <a:endParaRPr lang="de-CH" b="1" dirty="0">
+              <a:solidFill>
+                <a:schemeClr val="tx1"/>
+              </a:solidFill>
+              <a:latin typeface="Arial" panose="020B0604020202020204" pitchFamily="34" charset="0"/>
+              <a:cs typeface="Arial" panose="020B0604020202020204" pitchFamily="34" charset="0"/>
+            </a:endParaRPr>
+          </a:p>
+          <a:p>
+            <a:pPr algn="ctr"/>
+            <a:endParaRPr lang="de-CH" b="1" dirty="0">
+              <a:solidFill>
+                <a:schemeClr val="tx1"/>
+              </a:solidFill>
+              <a:latin typeface="Arial" panose="020B0604020202020204" pitchFamily="34" charset="0"/>
+              <a:cs typeface="Arial" panose="020B0604020202020204" pitchFamily="34" charset="0"/>
+            </a:endParaRPr>
+          </a:p>
+        </p:txBody>
+      </p:sp>
+      <p:sp>
+        <p:nvSpPr>
+          <p:cNvPr id="4" name="Pfeil: nach rechts 3">
+            <a:extLst>
+              <a:ext uri="{FF2B5EF4-FFF2-40B4-BE49-F238E27FC236}">
+                <a16:creationId xmlns:a16="http://schemas.microsoft.com/office/drawing/2014/main" id="{E63618D3-7625-E875-5354-769B8EBB1179}"/>
+              </a:ext>
+            </a:extLst>
+          </p:cNvPr>
+          <p:cNvSpPr/>
+          <p:nvPr/>
+        </p:nvSpPr>
+        <p:spPr>
+          <a:xfrm>
+            <a:off x="2739781" y="1204609"/>
+            <a:ext cx="623944" cy="365760"/>
+          </a:xfrm>
+          <a:prstGeom prst="rightArrow">
+            <a:avLst/>
+          </a:prstGeom>
+          <a:noFill/>
+          <a:ln w="28575">
+            <a:solidFill>
+              <a:schemeClr val="tx1"/>
+            </a:solidFill>
+          </a:ln>
+        </p:spPr>
+        <p:style>
+          <a:lnRef idx="2">
+            <a:schemeClr val="accent1">
+              <a:shade val="15000"/>
+            </a:schemeClr>
+          </a:lnRef>
+          <a:fillRef idx="1">
+            <a:schemeClr val="accent1"/>
+          </a:fillRef>
+          <a:effectRef idx="0">
+            <a:schemeClr val="accent1"/>
+          </a:effectRef>
+          <a:fontRef idx="minor">
+            <a:schemeClr val="lt1"/>
+          </a:fontRef>
+        </p:style>
+        <p:txBody>
+          <a:bodyPr rtlCol="0" anchor="ctr"/>
+          <a:lstStyle/>
+          <a:p>
+            <a:pPr algn="ctr"/>
+            <a:endParaRPr lang="de-CH"/>
+          </a:p>
+        </p:txBody>
+      </p:sp>
+      <p:sp>
+        <p:nvSpPr>
+          <p:cNvPr id="9" name="Pfeil: nach rechts 8">
+            <a:extLst>
+              <a:ext uri="{FF2B5EF4-FFF2-40B4-BE49-F238E27FC236}">
+                <a16:creationId xmlns:a16="http://schemas.microsoft.com/office/drawing/2014/main" id="{480CCF0E-2FDE-7E06-5542-D3E439FE72AD}"/>
+              </a:ext>
+            </a:extLst>
+          </p:cNvPr>
+          <p:cNvSpPr/>
+          <p:nvPr/>
+        </p:nvSpPr>
+        <p:spPr>
+          <a:xfrm>
+            <a:off x="5108436" y="1204609"/>
+            <a:ext cx="623944" cy="365760"/>
+          </a:xfrm>
+          <a:prstGeom prst="rightArrow">
+            <a:avLst/>
+          </a:prstGeom>
+          <a:noFill/>
+          <a:ln w="28575">
+            <a:solidFill>
+              <a:schemeClr val="tx1"/>
+            </a:solidFill>
+          </a:ln>
+        </p:spPr>
+        <p:style>
+          <a:lnRef idx="2">
+            <a:schemeClr val="accent1">
+              <a:shade val="15000"/>
+            </a:schemeClr>
+          </a:lnRef>
+          <a:fillRef idx="1">
+            <a:schemeClr val="accent1"/>
+          </a:fillRef>
+          <a:effectRef idx="0">
+            <a:schemeClr val="accent1"/>
+          </a:effectRef>
+          <a:fontRef idx="minor">
+            <a:schemeClr val="lt1"/>
+          </a:fontRef>
+        </p:style>
+        <p:txBody>
+          <a:bodyPr rtlCol="0" anchor="ctr"/>
+          <a:lstStyle/>
+          <a:p>
+            <a:pPr algn="ctr"/>
+            <a:endParaRPr lang="de-CH"/>
+          </a:p>
+        </p:txBody>
+      </p:sp>
       <p:pic>
         <p:nvPicPr>
-          <p:cNvPr id="5" name="Grafik 4">
-            <a:extLst>
-              <a:ext uri="{FF2B5EF4-FFF2-40B4-BE49-F238E27FC236}">
-                <a16:creationId xmlns:a16="http://schemas.microsoft.com/office/drawing/2014/main" id="{61481711-4F82-4C9B-86E3-2390ACD1C9A7}"/>
+          <p:cNvPr id="15" name="Grafik 14">
+            <a:extLst>
+              <a:ext uri="{FF2B5EF4-FFF2-40B4-BE49-F238E27FC236}">
+                <a16:creationId xmlns:a16="http://schemas.microsoft.com/office/drawing/2014/main" id="{A859E9C5-B61C-3491-0DB9-2B59D4EE00B9}"/>
               </a:ext>
             </a:extLst>
           </p:cNvPr>
@@ -3112,8 +3307,366 @@
         </p:blipFill>
         <p:spPr>
           <a:xfrm>
-            <a:off x="2549906" y="357636"/>
-            <a:ext cx="2037426" cy="3025098"/>
+            <a:off x="5946894" y="339316"/>
+            <a:ext cx="2043715" cy="2144108"/>
+          </a:xfrm>
+          <a:prstGeom prst="rect">
+            <a:avLst/>
+          </a:prstGeom>
+        </p:spPr>
+      </p:pic>
+      <p:sp>
+        <p:nvSpPr>
+          <p:cNvPr id="16" name="Pfeil: nach rechts 15">
+            <a:extLst>
+              <a:ext uri="{FF2B5EF4-FFF2-40B4-BE49-F238E27FC236}">
+                <a16:creationId xmlns:a16="http://schemas.microsoft.com/office/drawing/2014/main" id="{DE1E6BDE-0D3B-2B1B-A574-DFE72FA02B2A}"/>
+              </a:ext>
+            </a:extLst>
+          </p:cNvPr>
+          <p:cNvSpPr/>
+          <p:nvPr/>
+        </p:nvSpPr>
+        <p:spPr>
+          <a:xfrm>
+            <a:off x="1433950" y="3518933"/>
+            <a:ext cx="623944" cy="365760"/>
+          </a:xfrm>
+          <a:prstGeom prst="rightArrow">
+            <a:avLst/>
+          </a:prstGeom>
+          <a:noFill/>
+          <a:ln w="28575">
+            <a:solidFill>
+              <a:schemeClr val="tx1"/>
+            </a:solidFill>
+          </a:ln>
+        </p:spPr>
+        <p:style>
+          <a:lnRef idx="2">
+            <a:schemeClr val="accent1">
+              <a:shade val="15000"/>
+            </a:schemeClr>
+          </a:lnRef>
+          <a:fillRef idx="1">
+            <a:schemeClr val="accent1"/>
+          </a:fillRef>
+          <a:effectRef idx="0">
+            <a:schemeClr val="accent1"/>
+          </a:effectRef>
+          <a:fontRef idx="minor">
+            <a:schemeClr val="lt1"/>
+          </a:fontRef>
+        </p:style>
+        <p:txBody>
+          <a:bodyPr rtlCol="0" anchor="ctr"/>
+          <a:lstStyle/>
+          <a:p>
+            <a:pPr algn="ctr"/>
+            <a:endParaRPr lang="de-CH"/>
+          </a:p>
+        </p:txBody>
+      </p:sp>
+      <p:pic>
+        <p:nvPicPr>
+          <p:cNvPr id="24" name="Grafik 23">
+            <a:extLst>
+              <a:ext uri="{FF2B5EF4-FFF2-40B4-BE49-F238E27FC236}">
+                <a16:creationId xmlns:a16="http://schemas.microsoft.com/office/drawing/2014/main" id="{4222F74F-8BB1-23C9-C225-4B7D8D550919}"/>
+              </a:ext>
+            </a:extLst>
+          </p:cNvPr>
+          <p:cNvPicPr>
+            <a:picLocks noChangeAspect="1"/>
+          </p:cNvPicPr>
+          <p:nvPr/>
+        </p:nvPicPr>
+        <p:blipFill>
+          <a:blip r:embed="rId4"/>
+          <a:stretch>
+            <a:fillRect/>
+          </a:stretch>
+        </p:blipFill>
+        <p:spPr>
+          <a:xfrm>
+            <a:off x="5836916" y="2529802"/>
+            <a:ext cx="2263669" cy="2144109"/>
+          </a:xfrm>
+          <a:prstGeom prst="rect">
+            <a:avLst/>
+          </a:prstGeom>
+        </p:spPr>
+      </p:pic>
+      <p:pic>
+        <p:nvPicPr>
+          <p:cNvPr id="26" name="Grafik 25">
+            <a:extLst>
+              <a:ext uri="{FF2B5EF4-FFF2-40B4-BE49-F238E27FC236}">
+                <a16:creationId xmlns:a16="http://schemas.microsoft.com/office/drawing/2014/main" id="{CED8465B-4685-75F9-40F6-8E1FDD0D6B4E}"/>
+              </a:ext>
+            </a:extLst>
+          </p:cNvPr>
+          <p:cNvPicPr>
+            <a:picLocks noChangeAspect="1"/>
+          </p:cNvPicPr>
+          <p:nvPr/>
+        </p:nvPicPr>
+        <p:blipFill>
+          <a:blip r:embed="rId5"/>
+          <a:stretch>
+            <a:fillRect/>
+          </a:stretch>
+        </p:blipFill>
+        <p:spPr>
+          <a:xfrm>
+            <a:off x="2286673" y="2814931"/>
+            <a:ext cx="2154103" cy="1697852"/>
+          </a:xfrm>
+          <a:prstGeom prst="rect">
+            <a:avLst/>
+          </a:prstGeom>
+        </p:spPr>
+      </p:pic>
+      <p:sp>
+        <p:nvSpPr>
+          <p:cNvPr id="27" name="Pfeil: nach rechts 26">
+            <a:extLst>
+              <a:ext uri="{FF2B5EF4-FFF2-40B4-BE49-F238E27FC236}">
+                <a16:creationId xmlns:a16="http://schemas.microsoft.com/office/drawing/2014/main" id="{70486B96-89EB-ABE2-394C-7065D1E6F563}"/>
+              </a:ext>
+            </a:extLst>
+          </p:cNvPr>
+          <p:cNvSpPr/>
+          <p:nvPr/>
+        </p:nvSpPr>
+        <p:spPr>
+          <a:xfrm>
+            <a:off x="5108436" y="3518933"/>
+            <a:ext cx="623944" cy="365760"/>
+          </a:xfrm>
+          <a:prstGeom prst="rightArrow">
+            <a:avLst/>
+          </a:prstGeom>
+          <a:noFill/>
+          <a:ln w="28575">
+            <a:solidFill>
+              <a:schemeClr val="tx1"/>
+            </a:solidFill>
+          </a:ln>
+        </p:spPr>
+        <p:style>
+          <a:lnRef idx="2">
+            <a:schemeClr val="accent1">
+              <a:shade val="15000"/>
+            </a:schemeClr>
+          </a:lnRef>
+          <a:fillRef idx="1">
+            <a:schemeClr val="accent1"/>
+          </a:fillRef>
+          <a:effectRef idx="0">
+            <a:schemeClr val="accent1"/>
+          </a:effectRef>
+          <a:fontRef idx="minor">
+            <a:schemeClr val="lt1"/>
+          </a:fontRef>
+        </p:style>
+        <p:txBody>
+          <a:bodyPr rtlCol="0" anchor="ctr"/>
+          <a:lstStyle/>
+          <a:p>
+            <a:pPr algn="ctr"/>
+            <a:endParaRPr lang="de-CH"/>
+          </a:p>
+        </p:txBody>
+      </p:sp>
+      <p:pic>
+        <p:nvPicPr>
+          <p:cNvPr id="31" name="Grafik 30">
+            <a:extLst>
+              <a:ext uri="{FF2B5EF4-FFF2-40B4-BE49-F238E27FC236}">
+                <a16:creationId xmlns:a16="http://schemas.microsoft.com/office/drawing/2014/main" id="{47FD86A1-E985-C066-2FEA-B4B779C500E1}"/>
+              </a:ext>
+            </a:extLst>
+          </p:cNvPr>
+          <p:cNvPicPr>
+            <a:picLocks noChangeAspect="1"/>
+          </p:cNvPicPr>
+          <p:nvPr/>
+        </p:nvPicPr>
+        <p:blipFill>
+          <a:blip r:embed="rId6"/>
+          <a:stretch>
+            <a:fillRect/>
+          </a:stretch>
+        </p:blipFill>
+        <p:spPr>
+          <a:xfrm>
+            <a:off x="2286673" y="4782496"/>
+            <a:ext cx="2209848" cy="1741790"/>
+          </a:xfrm>
+          <a:prstGeom prst="rect">
+            <a:avLst/>
+          </a:prstGeom>
+        </p:spPr>
+      </p:pic>
+      <p:sp>
+        <p:nvSpPr>
+          <p:cNvPr id="32" name="Pfeil: nach rechts 31">
+            <a:extLst>
+              <a:ext uri="{FF2B5EF4-FFF2-40B4-BE49-F238E27FC236}">
+                <a16:creationId xmlns:a16="http://schemas.microsoft.com/office/drawing/2014/main" id="{508059D0-DBD9-CD0F-458A-0290073AFF3C}"/>
+              </a:ext>
+            </a:extLst>
+          </p:cNvPr>
+          <p:cNvSpPr/>
+          <p:nvPr/>
+        </p:nvSpPr>
+        <p:spPr>
+          <a:xfrm>
+            <a:off x="1475763" y="5470511"/>
+            <a:ext cx="623944" cy="365760"/>
+          </a:xfrm>
+          <a:prstGeom prst="rightArrow">
+            <a:avLst/>
+          </a:prstGeom>
+          <a:noFill/>
+          <a:ln w="28575">
+            <a:solidFill>
+              <a:schemeClr val="tx1"/>
+            </a:solidFill>
+          </a:ln>
+        </p:spPr>
+        <p:style>
+          <a:lnRef idx="2">
+            <a:schemeClr val="accent1">
+              <a:shade val="15000"/>
+            </a:schemeClr>
+          </a:lnRef>
+          <a:fillRef idx="1">
+            <a:schemeClr val="accent1"/>
+          </a:fillRef>
+          <a:effectRef idx="0">
+            <a:schemeClr val="accent1"/>
+          </a:effectRef>
+          <a:fontRef idx="minor">
+            <a:schemeClr val="lt1"/>
+          </a:fontRef>
+        </p:style>
+        <p:txBody>
+          <a:bodyPr rtlCol="0" anchor="ctr"/>
+          <a:lstStyle/>
+          <a:p>
+            <a:pPr algn="ctr"/>
+            <a:endParaRPr lang="de-CH"/>
+          </a:p>
+        </p:txBody>
+      </p:sp>
+      <p:sp>
+        <p:nvSpPr>
+          <p:cNvPr id="35" name="Pfeil: nach rechts 34">
+            <a:extLst>
+              <a:ext uri="{FF2B5EF4-FFF2-40B4-BE49-F238E27FC236}">
+                <a16:creationId xmlns:a16="http://schemas.microsoft.com/office/drawing/2014/main" id="{E3622591-324C-8565-8509-79D0977A44A3}"/>
+              </a:ext>
+            </a:extLst>
+          </p:cNvPr>
+          <p:cNvSpPr/>
+          <p:nvPr/>
+        </p:nvSpPr>
+        <p:spPr>
+          <a:xfrm>
+            <a:off x="5185524" y="5387970"/>
+            <a:ext cx="623944" cy="365760"/>
+          </a:xfrm>
+          <a:prstGeom prst="rightArrow">
+            <a:avLst/>
+          </a:prstGeom>
+          <a:noFill/>
+          <a:ln w="28575">
+            <a:solidFill>
+              <a:schemeClr val="tx1"/>
+            </a:solidFill>
+          </a:ln>
+        </p:spPr>
+        <p:style>
+          <a:lnRef idx="2">
+            <a:schemeClr val="accent1">
+              <a:shade val="15000"/>
+            </a:schemeClr>
+          </a:lnRef>
+          <a:fillRef idx="1">
+            <a:schemeClr val="accent1"/>
+          </a:fillRef>
+          <a:effectRef idx="0">
+            <a:schemeClr val="accent1"/>
+          </a:effectRef>
+          <a:fontRef idx="minor">
+            <a:schemeClr val="lt1"/>
+          </a:fontRef>
+        </p:style>
+        <p:txBody>
+          <a:bodyPr rtlCol="0" anchor="ctr"/>
+          <a:lstStyle/>
+          <a:p>
+            <a:pPr algn="ctr"/>
+            <a:endParaRPr lang="de-CH"/>
+          </a:p>
+        </p:txBody>
+      </p:sp>
+      <p:pic>
+        <p:nvPicPr>
+          <p:cNvPr id="37" name="Grafik 36">
+            <a:extLst>
+              <a:ext uri="{FF2B5EF4-FFF2-40B4-BE49-F238E27FC236}">
+                <a16:creationId xmlns:a16="http://schemas.microsoft.com/office/drawing/2014/main" id="{47F77300-43CE-FA5B-A117-F828858A0544}"/>
+              </a:ext>
+            </a:extLst>
+          </p:cNvPr>
+          <p:cNvPicPr>
+            <a:picLocks noChangeAspect="1"/>
+          </p:cNvPicPr>
+          <p:nvPr/>
+        </p:nvPicPr>
+        <p:blipFill>
+          <a:blip r:embed="rId7"/>
+          <a:stretch>
+            <a:fillRect/>
+          </a:stretch>
+        </p:blipFill>
+        <p:spPr>
+          <a:xfrm>
+            <a:off x="5955531" y="4838714"/>
+            <a:ext cx="892078" cy="1701990"/>
+          </a:xfrm>
+          <a:prstGeom prst="rect">
+            <a:avLst/>
+          </a:prstGeom>
+        </p:spPr>
+      </p:pic>
+      <p:pic>
+        <p:nvPicPr>
+          <p:cNvPr id="39" name="Grafik 38">
+            <a:extLst>
+              <a:ext uri="{FF2B5EF4-FFF2-40B4-BE49-F238E27FC236}">
+                <a16:creationId xmlns:a16="http://schemas.microsoft.com/office/drawing/2014/main" id="{2AFCC7E1-DC5E-D9CF-D417-6494C4C5C88F}"/>
+              </a:ext>
+            </a:extLst>
+          </p:cNvPr>
+          <p:cNvPicPr>
+            <a:picLocks noChangeAspect="1"/>
+          </p:cNvPicPr>
+          <p:nvPr/>
+        </p:nvPicPr>
+        <p:blipFill>
+          <a:blip r:embed="rId8"/>
+          <a:stretch>
+            <a:fillRect/>
+          </a:stretch>
+        </p:blipFill>
+        <p:spPr>
+          <a:xfrm>
+            <a:off x="7014454" y="4993469"/>
+            <a:ext cx="1141481" cy="1520522"/>
           </a:xfrm>
           <a:prstGeom prst="rect">
             <a:avLst/>

--- a/Description/ResrvationNewLayout.pptx
+++ b/Description/ResrvationNewLayout.pptx
@@ -279,7 +279,7 @@
           <a:p>
             <a:fld id="{DDCE6D58-9B57-4731-A47B-3CD41B48F0A9}" type="datetimeFigureOut">
               <a:rPr lang="de-CH" smtClean="0"/>
-              <a:t>16.04.2026</a:t>
+              <a:t>13.05.2026</a:t>
             </a:fld>
             <a:endParaRPr lang="de-CH"/>
           </a:p>
@@ -449,7 +449,7 @@
           <a:p>
             <a:fld id="{DDCE6D58-9B57-4731-A47B-3CD41B48F0A9}" type="datetimeFigureOut">
               <a:rPr lang="de-CH" smtClean="0"/>
-              <a:t>16.04.2026</a:t>
+              <a:t>13.05.2026</a:t>
             </a:fld>
             <a:endParaRPr lang="de-CH"/>
           </a:p>
@@ -629,7 +629,7 @@
           <a:p>
             <a:fld id="{DDCE6D58-9B57-4731-A47B-3CD41B48F0A9}" type="datetimeFigureOut">
               <a:rPr lang="de-CH" smtClean="0"/>
-              <a:t>16.04.2026</a:t>
+              <a:t>13.05.2026</a:t>
             </a:fld>
             <a:endParaRPr lang="de-CH"/>
           </a:p>
@@ -799,7 +799,7 @@
           <a:p>
             <a:fld id="{DDCE6D58-9B57-4731-A47B-3CD41B48F0A9}" type="datetimeFigureOut">
               <a:rPr lang="de-CH" smtClean="0"/>
-              <a:t>16.04.2026</a:t>
+              <a:t>13.05.2026</a:t>
             </a:fld>
             <a:endParaRPr lang="de-CH"/>
           </a:p>
@@ -1045,7 +1045,7 @@
           <a:p>
             <a:fld id="{DDCE6D58-9B57-4731-A47B-3CD41B48F0A9}" type="datetimeFigureOut">
               <a:rPr lang="de-CH" smtClean="0"/>
-              <a:t>16.04.2026</a:t>
+              <a:t>13.05.2026</a:t>
             </a:fld>
             <a:endParaRPr lang="de-CH"/>
           </a:p>
@@ -1277,7 +1277,7 @@
           <a:p>
             <a:fld id="{DDCE6D58-9B57-4731-A47B-3CD41B48F0A9}" type="datetimeFigureOut">
               <a:rPr lang="de-CH" smtClean="0"/>
-              <a:t>16.04.2026</a:t>
+              <a:t>13.05.2026</a:t>
             </a:fld>
             <a:endParaRPr lang="de-CH"/>
           </a:p>
@@ -1644,7 +1644,7 @@
           <a:p>
             <a:fld id="{DDCE6D58-9B57-4731-A47B-3CD41B48F0A9}" type="datetimeFigureOut">
               <a:rPr lang="de-CH" smtClean="0"/>
-              <a:t>16.04.2026</a:t>
+              <a:t>13.05.2026</a:t>
             </a:fld>
             <a:endParaRPr lang="de-CH"/>
           </a:p>
@@ -1762,7 +1762,7 @@
           <a:p>
             <a:fld id="{DDCE6D58-9B57-4731-A47B-3CD41B48F0A9}" type="datetimeFigureOut">
               <a:rPr lang="de-CH" smtClean="0"/>
-              <a:t>16.04.2026</a:t>
+              <a:t>13.05.2026</a:t>
             </a:fld>
             <a:endParaRPr lang="de-CH"/>
           </a:p>
@@ -1857,7 +1857,7 @@
           <a:p>
             <a:fld id="{DDCE6D58-9B57-4731-A47B-3CD41B48F0A9}" type="datetimeFigureOut">
               <a:rPr lang="de-CH" smtClean="0"/>
-              <a:t>16.04.2026</a:t>
+              <a:t>13.05.2026</a:t>
             </a:fld>
             <a:endParaRPr lang="de-CH"/>
           </a:p>
@@ -2134,7 +2134,7 @@
           <a:p>
             <a:fld id="{DDCE6D58-9B57-4731-A47B-3CD41B48F0A9}" type="datetimeFigureOut">
               <a:rPr lang="de-CH" smtClean="0"/>
-              <a:t>16.04.2026</a:t>
+              <a:t>13.05.2026</a:t>
             </a:fld>
             <a:endParaRPr lang="de-CH"/>
           </a:p>
@@ -2387,7 +2387,7 @@
           <a:p>
             <a:fld id="{DDCE6D58-9B57-4731-A47B-3CD41B48F0A9}" type="datetimeFigureOut">
               <a:rPr lang="de-CH" smtClean="0"/>
-              <a:t>16.04.2026</a:t>
+              <a:t>13.05.2026</a:t>
             </a:fld>
             <a:endParaRPr lang="de-CH"/>
           </a:p>
@@ -2600,7 +2600,7 @@
           <a:p>
             <a:fld id="{DDCE6D58-9B57-4731-A47B-3CD41B48F0A9}" type="datetimeFigureOut">
               <a:rPr lang="de-CH" smtClean="0"/>
-              <a:t>16.04.2026</a:t>
+              <a:t>13.05.2026</a:t>
             </a:fld>
             <a:endParaRPr lang="de-CH"/>
           </a:p>
@@ -3019,7 +3019,7 @@
         </p:nvSpPr>
         <p:spPr>
           <a:xfrm>
-            <a:off x="3327951" y="470637"/>
+            <a:off x="2591830" y="343635"/>
             <a:ext cx="1794105" cy="461665"/>
           </a:xfrm>
           <a:prstGeom prst="rect">
@@ -3072,7 +3072,7 @@
         </p:blipFill>
         <p:spPr bwMode="auto">
           <a:xfrm>
-            <a:off x="3522751" y="932302"/>
+            <a:off x="2718415" y="805300"/>
             <a:ext cx="1451034" cy="1089888"/>
           </a:xfrm>
           <a:prstGeom prst="rect">
@@ -3092,10 +3092,10 @@
       </p:pic>
       <p:sp>
         <p:nvSpPr>
-          <p:cNvPr id="3" name="Rechteck: eine Ecke abgeschnitten 2">
-            <a:extLst>
-              <a:ext uri="{FF2B5EF4-FFF2-40B4-BE49-F238E27FC236}">
-                <a16:creationId xmlns:a16="http://schemas.microsoft.com/office/drawing/2014/main" id="{3D6A2AC0-443D-170A-283D-AECFDB8A6FD0}"/>
+          <p:cNvPr id="9" name="Pfeil: nach rechts 8">
+            <a:extLst>
+              <a:ext uri="{FF2B5EF4-FFF2-40B4-BE49-F238E27FC236}">
+                <a16:creationId xmlns:a16="http://schemas.microsoft.com/office/drawing/2014/main" id="{480CCF0E-2FDE-7E06-5542-D3E439FE72AD}"/>
               </a:ext>
             </a:extLst>
           </p:cNvPr>
@@ -3104,98 +3104,7 @@
         </p:nvSpPr>
         <p:spPr>
           <a:xfrm>
-            <a:off x="1433950" y="602669"/>
-            <a:ext cx="1069163" cy="1419521"/>
-          </a:xfrm>
-          <a:prstGeom prst="snip1Rect">
-            <a:avLst/>
-          </a:prstGeom>
-          <a:noFill/>
-          <a:ln>
-            <a:solidFill>
-              <a:schemeClr val="tx1"/>
-            </a:solidFill>
-          </a:ln>
-        </p:spPr>
-        <p:style>
-          <a:lnRef idx="2">
-            <a:schemeClr val="accent1">
-              <a:shade val="15000"/>
-            </a:schemeClr>
-          </a:lnRef>
-          <a:fillRef idx="1">
-            <a:schemeClr val="accent1"/>
-          </a:fillRef>
-          <a:effectRef idx="0">
-            <a:schemeClr val="accent1"/>
-          </a:effectRef>
-          <a:fontRef idx="minor">
-            <a:schemeClr val="lt1"/>
-          </a:fontRef>
-        </p:style>
-        <p:txBody>
-          <a:bodyPr rtlCol="0" anchor="ctr"/>
-          <a:lstStyle/>
-          <a:p>
-            <a:pPr algn="ctr"/>
-            <a:endParaRPr lang="de-CH" b="1" dirty="0">
-              <a:solidFill>
-                <a:schemeClr val="tx1"/>
-              </a:solidFill>
-              <a:latin typeface="Arial" panose="020B0604020202020204" pitchFamily="34" charset="0"/>
-              <a:cs typeface="Arial" panose="020B0604020202020204" pitchFamily="34" charset="0"/>
-            </a:endParaRPr>
-          </a:p>
-          <a:p>
-            <a:pPr algn="ctr"/>
-            <a:r>
-              <a:rPr lang="de-CH" b="1" dirty="0">
-                <a:solidFill>
-                  <a:schemeClr val="tx1"/>
-                </a:solidFill>
-                <a:latin typeface="Arial" panose="020B0604020202020204" pitchFamily="34" charset="0"/>
-                <a:cs typeface="Arial" panose="020B0604020202020204" pitchFamily="34" charset="0"/>
-              </a:rPr>
-              <a:t>Layout XML Datei</a:t>
-            </a:r>
-          </a:p>
-          <a:p>
-            <a:pPr algn="ctr"/>
-            <a:endParaRPr lang="de-CH" b="1" dirty="0">
-              <a:solidFill>
-                <a:schemeClr val="tx1"/>
-              </a:solidFill>
-              <a:latin typeface="Arial" panose="020B0604020202020204" pitchFamily="34" charset="0"/>
-              <a:cs typeface="Arial" panose="020B0604020202020204" pitchFamily="34" charset="0"/>
-            </a:endParaRPr>
-          </a:p>
-          <a:p>
-            <a:pPr algn="ctr"/>
-            <a:endParaRPr lang="de-CH" b="1" dirty="0">
-              <a:solidFill>
-                <a:schemeClr val="tx1"/>
-              </a:solidFill>
-              <a:latin typeface="Arial" panose="020B0604020202020204" pitchFamily="34" charset="0"/>
-              <a:cs typeface="Arial" panose="020B0604020202020204" pitchFamily="34" charset="0"/>
-            </a:endParaRPr>
-          </a:p>
-        </p:txBody>
-      </p:sp>
-      <p:sp>
-        <p:nvSpPr>
-          <p:cNvPr id="4" name="Pfeil: nach rechts 3">
-            <a:extLst>
-              <a:ext uri="{FF2B5EF4-FFF2-40B4-BE49-F238E27FC236}">
-                <a16:creationId xmlns:a16="http://schemas.microsoft.com/office/drawing/2014/main" id="{E63618D3-7625-E875-5354-769B8EBB1179}"/>
-              </a:ext>
-            </a:extLst>
-          </p:cNvPr>
-          <p:cNvSpPr/>
-          <p:nvPr/>
-        </p:nvSpPr>
-        <p:spPr>
-          <a:xfrm>
-            <a:off x="2739781" y="1204609"/>
+            <a:off x="5108436" y="1204609"/>
             <a:ext cx="623944" cy="365760"/>
           </a:xfrm>
           <a:prstGeom prst="rightArrow">
@@ -3235,10 +3144,10 @@
       </p:sp>
       <p:sp>
         <p:nvSpPr>
-          <p:cNvPr id="9" name="Pfeil: nach rechts 8">
-            <a:extLst>
-              <a:ext uri="{FF2B5EF4-FFF2-40B4-BE49-F238E27FC236}">
-                <a16:creationId xmlns:a16="http://schemas.microsoft.com/office/drawing/2014/main" id="{480CCF0E-2FDE-7E06-5542-D3E439FE72AD}"/>
+          <p:cNvPr id="16" name="Pfeil: nach rechts 15">
+            <a:extLst>
+              <a:ext uri="{FF2B5EF4-FFF2-40B4-BE49-F238E27FC236}">
+                <a16:creationId xmlns:a16="http://schemas.microsoft.com/office/drawing/2014/main" id="{DE1E6BDE-0D3B-2B1B-A574-DFE72FA02B2A}"/>
               </a:ext>
             </a:extLst>
           </p:cNvPr>
@@ -3247,7 +3156,7 @@
         </p:nvSpPr>
         <p:spPr>
           <a:xfrm>
-            <a:off x="5108436" y="1204609"/>
+            <a:off x="1433950" y="3772937"/>
             <a:ext cx="623944" cy="365760"/>
           </a:xfrm>
           <a:prstGeom prst="rightArrow">
@@ -3287,10 +3196,10 @@
       </p:sp>
       <p:pic>
         <p:nvPicPr>
-          <p:cNvPr id="15" name="Grafik 14">
-            <a:extLst>
-              <a:ext uri="{FF2B5EF4-FFF2-40B4-BE49-F238E27FC236}">
-                <a16:creationId xmlns:a16="http://schemas.microsoft.com/office/drawing/2014/main" id="{A859E9C5-B61C-3491-0DB9-2B59D4EE00B9}"/>
+          <p:cNvPr id="24" name="Grafik 23">
+            <a:extLst>
+              <a:ext uri="{FF2B5EF4-FFF2-40B4-BE49-F238E27FC236}">
+                <a16:creationId xmlns:a16="http://schemas.microsoft.com/office/drawing/2014/main" id="{4222F74F-8BB1-23C9-C225-4B7D8D550919}"/>
               </a:ext>
             </a:extLst>
           </p:cNvPr>
@@ -3307,72 +3216,20 @@
         </p:blipFill>
         <p:spPr>
           <a:xfrm>
-            <a:off x="5946894" y="339316"/>
-            <a:ext cx="2043715" cy="2144108"/>
+            <a:off x="5836916" y="2783806"/>
+            <a:ext cx="2263669" cy="2144109"/>
           </a:xfrm>
           <a:prstGeom prst="rect">
             <a:avLst/>
           </a:prstGeom>
         </p:spPr>
       </p:pic>
-      <p:sp>
-        <p:nvSpPr>
-          <p:cNvPr id="16" name="Pfeil: nach rechts 15">
-            <a:extLst>
-              <a:ext uri="{FF2B5EF4-FFF2-40B4-BE49-F238E27FC236}">
-                <a16:creationId xmlns:a16="http://schemas.microsoft.com/office/drawing/2014/main" id="{DE1E6BDE-0D3B-2B1B-A574-DFE72FA02B2A}"/>
-              </a:ext>
-            </a:extLst>
-          </p:cNvPr>
-          <p:cNvSpPr/>
-          <p:nvPr/>
-        </p:nvSpPr>
-        <p:spPr>
-          <a:xfrm>
-            <a:off x="1433950" y="3518933"/>
-            <a:ext cx="623944" cy="365760"/>
-          </a:xfrm>
-          <a:prstGeom prst="rightArrow">
-            <a:avLst/>
-          </a:prstGeom>
-          <a:noFill/>
-          <a:ln w="28575">
-            <a:solidFill>
-              <a:schemeClr val="tx1"/>
-            </a:solidFill>
-          </a:ln>
-        </p:spPr>
-        <p:style>
-          <a:lnRef idx="2">
-            <a:schemeClr val="accent1">
-              <a:shade val="15000"/>
-            </a:schemeClr>
-          </a:lnRef>
-          <a:fillRef idx="1">
-            <a:schemeClr val="accent1"/>
-          </a:fillRef>
-          <a:effectRef idx="0">
-            <a:schemeClr val="accent1"/>
-          </a:effectRef>
-          <a:fontRef idx="minor">
-            <a:schemeClr val="lt1"/>
-          </a:fontRef>
-        </p:style>
-        <p:txBody>
-          <a:bodyPr rtlCol="0" anchor="ctr"/>
-          <a:lstStyle/>
-          <a:p>
-            <a:pPr algn="ctr"/>
-            <a:endParaRPr lang="de-CH"/>
-          </a:p>
-        </p:txBody>
-      </p:sp>
       <p:pic>
         <p:nvPicPr>
-          <p:cNvPr id="24" name="Grafik 23">
-            <a:extLst>
-              <a:ext uri="{FF2B5EF4-FFF2-40B4-BE49-F238E27FC236}">
-                <a16:creationId xmlns:a16="http://schemas.microsoft.com/office/drawing/2014/main" id="{4222F74F-8BB1-23C9-C225-4B7D8D550919}"/>
+          <p:cNvPr id="26" name="Grafik 25">
+            <a:extLst>
+              <a:ext uri="{FF2B5EF4-FFF2-40B4-BE49-F238E27FC236}">
+                <a16:creationId xmlns:a16="http://schemas.microsoft.com/office/drawing/2014/main" id="{CED8465B-4685-75F9-40F6-8E1FDD0D6B4E}"/>
               </a:ext>
             </a:extLst>
           </p:cNvPr>
@@ -3389,20 +3246,72 @@
         </p:blipFill>
         <p:spPr>
           <a:xfrm>
-            <a:off x="5836916" y="2529802"/>
-            <a:ext cx="2263669" cy="2144109"/>
+            <a:off x="2286673" y="3068935"/>
+            <a:ext cx="2154103" cy="1697852"/>
           </a:xfrm>
           <a:prstGeom prst="rect">
             <a:avLst/>
           </a:prstGeom>
         </p:spPr>
       </p:pic>
+      <p:sp>
+        <p:nvSpPr>
+          <p:cNvPr id="27" name="Pfeil: nach rechts 26">
+            <a:extLst>
+              <a:ext uri="{FF2B5EF4-FFF2-40B4-BE49-F238E27FC236}">
+                <a16:creationId xmlns:a16="http://schemas.microsoft.com/office/drawing/2014/main" id="{70486B96-89EB-ABE2-394C-7065D1E6F563}"/>
+              </a:ext>
+            </a:extLst>
+          </p:cNvPr>
+          <p:cNvSpPr/>
+          <p:nvPr/>
+        </p:nvSpPr>
+        <p:spPr>
+          <a:xfrm>
+            <a:off x="5108436" y="3772937"/>
+            <a:ext cx="623944" cy="365760"/>
+          </a:xfrm>
+          <a:prstGeom prst="rightArrow">
+            <a:avLst/>
+          </a:prstGeom>
+          <a:noFill/>
+          <a:ln w="28575">
+            <a:solidFill>
+              <a:schemeClr val="tx1"/>
+            </a:solidFill>
+          </a:ln>
+        </p:spPr>
+        <p:style>
+          <a:lnRef idx="2">
+            <a:schemeClr val="accent1">
+              <a:shade val="15000"/>
+            </a:schemeClr>
+          </a:lnRef>
+          <a:fillRef idx="1">
+            <a:schemeClr val="accent1"/>
+          </a:fillRef>
+          <a:effectRef idx="0">
+            <a:schemeClr val="accent1"/>
+          </a:effectRef>
+          <a:fontRef idx="minor">
+            <a:schemeClr val="lt1"/>
+          </a:fontRef>
+        </p:style>
+        <p:txBody>
+          <a:bodyPr rtlCol="0" anchor="ctr"/>
+          <a:lstStyle/>
+          <a:p>
+            <a:pPr algn="ctr"/>
+            <a:endParaRPr lang="de-CH"/>
+          </a:p>
+        </p:txBody>
+      </p:sp>
       <p:pic>
         <p:nvPicPr>
-          <p:cNvPr id="26" name="Grafik 25">
-            <a:extLst>
-              <a:ext uri="{FF2B5EF4-FFF2-40B4-BE49-F238E27FC236}">
-                <a16:creationId xmlns:a16="http://schemas.microsoft.com/office/drawing/2014/main" id="{CED8465B-4685-75F9-40F6-8E1FDD0D6B4E}"/>
+          <p:cNvPr id="31" name="Grafik 30">
+            <a:extLst>
+              <a:ext uri="{FF2B5EF4-FFF2-40B4-BE49-F238E27FC236}">
+                <a16:creationId xmlns:a16="http://schemas.microsoft.com/office/drawing/2014/main" id="{47FD86A1-E985-C066-2FEA-B4B779C500E1}"/>
               </a:ext>
             </a:extLst>
           </p:cNvPr>
@@ -3419,8 +3328,8 @@
         </p:blipFill>
         <p:spPr>
           <a:xfrm>
-            <a:off x="2286673" y="2814931"/>
-            <a:ext cx="2154103" cy="1697852"/>
+            <a:off x="2286673" y="5036500"/>
+            <a:ext cx="2209848" cy="1741790"/>
           </a:xfrm>
           <a:prstGeom prst="rect">
             <a:avLst/>
@@ -3429,10 +3338,10 @@
       </p:pic>
       <p:sp>
         <p:nvSpPr>
-          <p:cNvPr id="27" name="Pfeil: nach rechts 26">
-            <a:extLst>
-              <a:ext uri="{FF2B5EF4-FFF2-40B4-BE49-F238E27FC236}">
-                <a16:creationId xmlns:a16="http://schemas.microsoft.com/office/drawing/2014/main" id="{70486B96-89EB-ABE2-394C-7065D1E6F563}"/>
+          <p:cNvPr id="32" name="Pfeil: nach rechts 31">
+            <a:extLst>
+              <a:ext uri="{FF2B5EF4-FFF2-40B4-BE49-F238E27FC236}">
+                <a16:creationId xmlns:a16="http://schemas.microsoft.com/office/drawing/2014/main" id="{508059D0-DBD9-CD0F-458A-0290073AFF3C}"/>
               </a:ext>
             </a:extLst>
           </p:cNvPr>
@@ -3441,7 +3350,7 @@
         </p:nvSpPr>
         <p:spPr>
           <a:xfrm>
-            <a:off x="5108436" y="3518933"/>
+            <a:off x="1475763" y="5724515"/>
             <a:ext cx="623944" cy="365760"/>
           </a:xfrm>
           <a:prstGeom prst="rightArrow">
@@ -3479,12 +3388,64 @@
           </a:p>
         </p:txBody>
       </p:sp>
+      <p:sp>
+        <p:nvSpPr>
+          <p:cNvPr id="35" name="Pfeil: nach rechts 34">
+            <a:extLst>
+              <a:ext uri="{FF2B5EF4-FFF2-40B4-BE49-F238E27FC236}">
+                <a16:creationId xmlns:a16="http://schemas.microsoft.com/office/drawing/2014/main" id="{E3622591-324C-8565-8509-79D0977A44A3}"/>
+              </a:ext>
+            </a:extLst>
+          </p:cNvPr>
+          <p:cNvSpPr/>
+          <p:nvPr/>
+        </p:nvSpPr>
+        <p:spPr>
+          <a:xfrm>
+            <a:off x="5185524" y="5641974"/>
+            <a:ext cx="623944" cy="365760"/>
+          </a:xfrm>
+          <a:prstGeom prst="rightArrow">
+            <a:avLst/>
+          </a:prstGeom>
+          <a:noFill/>
+          <a:ln w="28575">
+            <a:solidFill>
+              <a:schemeClr val="tx1"/>
+            </a:solidFill>
+          </a:ln>
+        </p:spPr>
+        <p:style>
+          <a:lnRef idx="2">
+            <a:schemeClr val="accent1">
+              <a:shade val="15000"/>
+            </a:schemeClr>
+          </a:lnRef>
+          <a:fillRef idx="1">
+            <a:schemeClr val="accent1"/>
+          </a:fillRef>
+          <a:effectRef idx="0">
+            <a:schemeClr val="accent1"/>
+          </a:effectRef>
+          <a:fontRef idx="minor">
+            <a:schemeClr val="lt1"/>
+          </a:fontRef>
+        </p:style>
+        <p:txBody>
+          <a:bodyPr rtlCol="0" anchor="ctr"/>
+          <a:lstStyle/>
+          <a:p>
+            <a:pPr algn="ctr"/>
+            <a:endParaRPr lang="de-CH"/>
+          </a:p>
+        </p:txBody>
+      </p:sp>
       <p:pic>
         <p:nvPicPr>
-          <p:cNvPr id="31" name="Grafik 30">
-            <a:extLst>
-              <a:ext uri="{FF2B5EF4-FFF2-40B4-BE49-F238E27FC236}">
-                <a16:creationId xmlns:a16="http://schemas.microsoft.com/office/drawing/2014/main" id="{47FD86A1-E985-C066-2FEA-B4B779C500E1}"/>
+          <p:cNvPr id="37" name="Grafik 36">
+            <a:extLst>
+              <a:ext uri="{FF2B5EF4-FFF2-40B4-BE49-F238E27FC236}">
+                <a16:creationId xmlns:a16="http://schemas.microsoft.com/office/drawing/2014/main" id="{47F77300-43CE-FA5B-A117-F828858A0544}"/>
               </a:ext>
             </a:extLst>
           </p:cNvPr>
@@ -3501,124 +3462,20 @@
         </p:blipFill>
         <p:spPr>
           <a:xfrm>
-            <a:off x="2286673" y="4782496"/>
-            <a:ext cx="2209848" cy="1741790"/>
+            <a:off x="5955531" y="5092718"/>
+            <a:ext cx="892078" cy="1701990"/>
           </a:xfrm>
           <a:prstGeom prst="rect">
             <a:avLst/>
           </a:prstGeom>
         </p:spPr>
       </p:pic>
-      <p:sp>
-        <p:nvSpPr>
-          <p:cNvPr id="32" name="Pfeil: nach rechts 31">
-            <a:extLst>
-              <a:ext uri="{FF2B5EF4-FFF2-40B4-BE49-F238E27FC236}">
-                <a16:creationId xmlns:a16="http://schemas.microsoft.com/office/drawing/2014/main" id="{508059D0-DBD9-CD0F-458A-0290073AFF3C}"/>
-              </a:ext>
-            </a:extLst>
-          </p:cNvPr>
-          <p:cNvSpPr/>
-          <p:nvPr/>
-        </p:nvSpPr>
-        <p:spPr>
-          <a:xfrm>
-            <a:off x="1475763" y="5470511"/>
-            <a:ext cx="623944" cy="365760"/>
-          </a:xfrm>
-          <a:prstGeom prst="rightArrow">
-            <a:avLst/>
-          </a:prstGeom>
-          <a:noFill/>
-          <a:ln w="28575">
-            <a:solidFill>
-              <a:schemeClr val="tx1"/>
-            </a:solidFill>
-          </a:ln>
-        </p:spPr>
-        <p:style>
-          <a:lnRef idx="2">
-            <a:schemeClr val="accent1">
-              <a:shade val="15000"/>
-            </a:schemeClr>
-          </a:lnRef>
-          <a:fillRef idx="1">
-            <a:schemeClr val="accent1"/>
-          </a:fillRef>
-          <a:effectRef idx="0">
-            <a:schemeClr val="accent1"/>
-          </a:effectRef>
-          <a:fontRef idx="minor">
-            <a:schemeClr val="lt1"/>
-          </a:fontRef>
-        </p:style>
-        <p:txBody>
-          <a:bodyPr rtlCol="0" anchor="ctr"/>
-          <a:lstStyle/>
-          <a:p>
-            <a:pPr algn="ctr"/>
-            <a:endParaRPr lang="de-CH"/>
-          </a:p>
-        </p:txBody>
-      </p:sp>
-      <p:sp>
-        <p:nvSpPr>
-          <p:cNvPr id="35" name="Pfeil: nach rechts 34">
-            <a:extLst>
-              <a:ext uri="{FF2B5EF4-FFF2-40B4-BE49-F238E27FC236}">
-                <a16:creationId xmlns:a16="http://schemas.microsoft.com/office/drawing/2014/main" id="{E3622591-324C-8565-8509-79D0977A44A3}"/>
-              </a:ext>
-            </a:extLst>
-          </p:cNvPr>
-          <p:cNvSpPr/>
-          <p:nvPr/>
-        </p:nvSpPr>
-        <p:spPr>
-          <a:xfrm>
-            <a:off x="5185524" y="5387970"/>
-            <a:ext cx="623944" cy="365760"/>
-          </a:xfrm>
-          <a:prstGeom prst="rightArrow">
-            <a:avLst/>
-          </a:prstGeom>
-          <a:noFill/>
-          <a:ln w="28575">
-            <a:solidFill>
-              <a:schemeClr val="tx1"/>
-            </a:solidFill>
-          </a:ln>
-        </p:spPr>
-        <p:style>
-          <a:lnRef idx="2">
-            <a:schemeClr val="accent1">
-              <a:shade val="15000"/>
-            </a:schemeClr>
-          </a:lnRef>
-          <a:fillRef idx="1">
-            <a:schemeClr val="accent1"/>
-          </a:fillRef>
-          <a:effectRef idx="0">
-            <a:schemeClr val="accent1"/>
-          </a:effectRef>
-          <a:fontRef idx="minor">
-            <a:schemeClr val="lt1"/>
-          </a:fontRef>
-        </p:style>
-        <p:txBody>
-          <a:bodyPr rtlCol="0" anchor="ctr"/>
-          <a:lstStyle/>
-          <a:p>
-            <a:pPr algn="ctr"/>
-            <a:endParaRPr lang="de-CH"/>
-          </a:p>
-        </p:txBody>
-      </p:sp>
       <p:pic>
         <p:nvPicPr>
-          <p:cNvPr id="37" name="Grafik 36">
-            <a:extLst>
-              <a:ext uri="{FF2B5EF4-FFF2-40B4-BE49-F238E27FC236}">
-                <a16:creationId xmlns:a16="http://schemas.microsoft.com/office/drawing/2014/main" id="{47F77300-43CE-FA5B-A117-F828858A0544}"/>
+          <p:cNvPr id="39" name="Grafik 38">
+            <a:extLst>
+              <a:ext uri="{FF2B5EF4-FFF2-40B4-BE49-F238E27FC236}">
+                <a16:creationId xmlns:a16="http://schemas.microsoft.com/office/drawing/2014/main" id="{2AFCC7E1-DC5E-D9CF-D417-6494C4C5C88F}"/>
               </a:ext>
             </a:extLst>
           </p:cNvPr>
@@ -3635,8 +3492,8 @@
         </p:blipFill>
         <p:spPr>
           <a:xfrm>
-            <a:off x="5955531" y="4838714"/>
-            <a:ext cx="892078" cy="1701990"/>
+            <a:off x="7014454" y="5247473"/>
+            <a:ext cx="1141481" cy="1520522"/>
           </a:xfrm>
           <a:prstGeom prst="rect">
             <a:avLst/>
@@ -3645,10 +3502,10 @@
       </p:pic>
       <p:pic>
         <p:nvPicPr>
-          <p:cNvPr id="39" name="Grafik 38">
-            <a:extLst>
-              <a:ext uri="{FF2B5EF4-FFF2-40B4-BE49-F238E27FC236}">
-                <a16:creationId xmlns:a16="http://schemas.microsoft.com/office/drawing/2014/main" id="{2AFCC7E1-DC5E-D9CF-D417-6494C4C5C88F}"/>
+          <p:cNvPr id="7" name="Grafik 6">
+            <a:extLst>
+              <a:ext uri="{FF2B5EF4-FFF2-40B4-BE49-F238E27FC236}">
+                <a16:creationId xmlns:a16="http://schemas.microsoft.com/office/drawing/2014/main" id="{7FB7A527-BBCE-7268-D0E7-ED24CA079D41}"/>
               </a:ext>
             </a:extLst>
           </p:cNvPr>
@@ -3665,8 +3522,142 @@
         </p:blipFill>
         <p:spPr>
           <a:xfrm>
-            <a:off x="7014454" y="4993469"/>
-            <a:ext cx="1141481" cy="1520522"/>
+            <a:off x="5946894" y="344238"/>
+            <a:ext cx="2084960" cy="2430057"/>
+          </a:xfrm>
+          <a:prstGeom prst="rect">
+            <a:avLst/>
+          </a:prstGeom>
+        </p:spPr>
+      </p:pic>
+      <p:sp>
+        <p:nvSpPr>
+          <p:cNvPr id="13" name="Pfeil: nach rechts 12">
+            <a:extLst>
+              <a:ext uri="{FF2B5EF4-FFF2-40B4-BE49-F238E27FC236}">
+                <a16:creationId xmlns:a16="http://schemas.microsoft.com/office/drawing/2014/main" id="{0D71785A-E476-C521-3A2A-84F41E20CD40}"/>
+              </a:ext>
+            </a:extLst>
+          </p:cNvPr>
+          <p:cNvSpPr/>
+          <p:nvPr/>
+        </p:nvSpPr>
+        <p:spPr>
+          <a:xfrm>
+            <a:off x="1433950" y="2431114"/>
+            <a:ext cx="623944" cy="365760"/>
+          </a:xfrm>
+          <a:prstGeom prst="rightArrow">
+            <a:avLst/>
+          </a:prstGeom>
+          <a:noFill/>
+          <a:ln w="28575">
+            <a:solidFill>
+              <a:schemeClr val="tx1"/>
+            </a:solidFill>
+          </a:ln>
+        </p:spPr>
+        <p:style>
+          <a:lnRef idx="2">
+            <a:schemeClr val="accent1">
+              <a:shade val="15000"/>
+            </a:schemeClr>
+          </a:lnRef>
+          <a:fillRef idx="1">
+            <a:schemeClr val="accent1"/>
+          </a:fillRef>
+          <a:effectRef idx="0">
+            <a:schemeClr val="accent1"/>
+          </a:effectRef>
+          <a:fontRef idx="minor">
+            <a:schemeClr val="lt1"/>
+          </a:fontRef>
+        </p:style>
+        <p:txBody>
+          <a:bodyPr rtlCol="0" anchor="ctr"/>
+          <a:lstStyle/>
+          <a:p>
+            <a:pPr algn="ctr"/>
+            <a:endParaRPr lang="de-CH"/>
+          </a:p>
+        </p:txBody>
+      </p:sp>
+      <p:sp>
+        <p:nvSpPr>
+          <p:cNvPr id="14" name="Pfeil: nach rechts 13">
+            <a:extLst>
+              <a:ext uri="{FF2B5EF4-FFF2-40B4-BE49-F238E27FC236}">
+                <a16:creationId xmlns:a16="http://schemas.microsoft.com/office/drawing/2014/main" id="{6441599B-1695-B7BB-1063-A2324A3D8DB5}"/>
+              </a:ext>
+            </a:extLst>
+          </p:cNvPr>
+          <p:cNvSpPr/>
+          <p:nvPr/>
+        </p:nvSpPr>
+        <p:spPr>
+          <a:xfrm>
+            <a:off x="5122056" y="2378842"/>
+            <a:ext cx="623944" cy="365760"/>
+          </a:xfrm>
+          <a:prstGeom prst="rightArrow">
+            <a:avLst/>
+          </a:prstGeom>
+          <a:noFill/>
+          <a:ln w="28575">
+            <a:solidFill>
+              <a:schemeClr val="tx1"/>
+            </a:solidFill>
+          </a:ln>
+        </p:spPr>
+        <p:style>
+          <a:lnRef idx="2">
+            <a:schemeClr val="accent1">
+              <a:shade val="15000"/>
+            </a:schemeClr>
+          </a:lnRef>
+          <a:fillRef idx="1">
+            <a:schemeClr val="accent1"/>
+          </a:fillRef>
+          <a:effectRef idx="0">
+            <a:schemeClr val="accent1"/>
+          </a:effectRef>
+          <a:fontRef idx="minor">
+            <a:schemeClr val="lt1"/>
+          </a:fontRef>
+        </p:style>
+        <p:txBody>
+          <a:bodyPr rtlCol="0" anchor="ctr"/>
+          <a:lstStyle/>
+          <a:p>
+            <a:pPr algn="ctr"/>
+            <a:endParaRPr lang="de-CH"/>
+          </a:p>
+        </p:txBody>
+      </p:sp>
+      <p:pic>
+        <p:nvPicPr>
+          <p:cNvPr id="18" name="Grafik 17">
+            <a:extLst>
+              <a:ext uri="{FF2B5EF4-FFF2-40B4-BE49-F238E27FC236}">
+                <a16:creationId xmlns:a16="http://schemas.microsoft.com/office/drawing/2014/main" id="{BD17F727-2BB5-1967-B3CF-413D6D9A8D0D}"/>
+              </a:ext>
+            </a:extLst>
+          </p:cNvPr>
+          <p:cNvPicPr>
+            <a:picLocks noChangeAspect="1"/>
+          </p:cNvPicPr>
+          <p:nvPr/>
+        </p:nvPicPr>
+        <p:blipFill>
+          <a:blip r:embed="rId9"/>
+          <a:stretch>
+            <a:fillRect/>
+          </a:stretch>
+        </p:blipFill>
+        <p:spPr>
+          <a:xfrm>
+            <a:off x="2274834" y="1979047"/>
+            <a:ext cx="2537683" cy="1037199"/>
           </a:xfrm>
           <a:prstGeom prst="rect">
             <a:avLst/>
